--- a/EXPOSICION2.pptx
+++ b/EXPOSICION2.pptx
@@ -222,7 +222,7 @@
           <a:p>
             <a:fld id="{E3CFD575-157A-41E6-9D75-7310B9B21CA2}" type="datetimeFigureOut">
               <a:rPr lang="es-PE" smtClean="0"/>
-              <a:t>21/08/2025</a:t>
+              <a:t>22/08/2025</a:t>
             </a:fld>
             <a:endParaRPr lang="es-PE"/>
           </a:p>
@@ -905,7 +905,7 @@
           <a:p>
             <a:fld id="{193A4EF1-311E-4B8E-987F-E5E4DBC981B3}" type="datetimeFigureOut">
               <a:rPr lang="es-PE" smtClean="0"/>
-              <a:t>21/08/2025</a:t>
+              <a:t>22/08/2025</a:t>
             </a:fld>
             <a:endParaRPr lang="es-PE"/>
           </a:p>
@@ -1229,7 +1229,7 @@
           <a:p>
             <a:fld id="{193A4EF1-311E-4B8E-987F-E5E4DBC981B3}" type="datetimeFigureOut">
               <a:rPr lang="es-PE" smtClean="0"/>
-              <a:t>21/08/2025</a:t>
+              <a:t>22/08/2025</a:t>
             </a:fld>
             <a:endParaRPr lang="es-PE"/>
           </a:p>
@@ -1477,7 +1477,7 @@
           <a:p>
             <a:fld id="{193A4EF1-311E-4B8E-987F-E5E4DBC981B3}" type="datetimeFigureOut">
               <a:rPr lang="es-PE" smtClean="0"/>
-              <a:t>21/08/2025</a:t>
+              <a:t>22/08/2025</a:t>
             </a:fld>
             <a:endParaRPr lang="es-PE"/>
           </a:p>
@@ -1816,7 +1816,7 @@
           <a:p>
             <a:fld id="{193A4EF1-311E-4B8E-987F-E5E4DBC981B3}" type="datetimeFigureOut">
               <a:rPr lang="es-PE" smtClean="0"/>
-              <a:t>21/08/2025</a:t>
+              <a:t>22/08/2025</a:t>
             </a:fld>
             <a:endParaRPr lang="es-PE"/>
           </a:p>
@@ -2163,7 +2163,7 @@
           <a:p>
             <a:fld id="{193A4EF1-311E-4B8E-987F-E5E4DBC981B3}" type="datetimeFigureOut">
               <a:rPr lang="es-PE" smtClean="0"/>
-              <a:t>21/08/2025</a:t>
+              <a:t>22/08/2025</a:t>
             </a:fld>
             <a:endParaRPr lang="es-PE"/>
           </a:p>
@@ -2537,7 +2537,7 @@
           <a:p>
             <a:fld id="{193A4EF1-311E-4B8E-987F-E5E4DBC981B3}" type="datetimeFigureOut">
               <a:rPr lang="es-PE" smtClean="0"/>
-              <a:t>21/08/2025</a:t>
+              <a:t>22/08/2025</a:t>
             </a:fld>
             <a:endParaRPr lang="es-PE"/>
           </a:p>
@@ -3007,7 +3007,7 @@
           <a:p>
             <a:fld id="{193A4EF1-311E-4B8E-987F-E5E4DBC981B3}" type="datetimeFigureOut">
               <a:rPr lang="es-PE" smtClean="0"/>
-              <a:t>21/08/2025</a:t>
+              <a:t>22/08/2025</a:t>
             </a:fld>
             <a:endParaRPr lang="es-PE"/>
           </a:p>
@@ -3212,7 +3212,7 @@
           <a:p>
             <a:fld id="{193A4EF1-311E-4B8E-987F-E5E4DBC981B3}" type="datetimeFigureOut">
               <a:rPr lang="es-PE" smtClean="0"/>
-              <a:t>21/08/2025</a:t>
+              <a:t>22/08/2025</a:t>
             </a:fld>
             <a:endParaRPr lang="es-PE"/>
           </a:p>
@@ -3423,7 +3423,7 @@
           <a:p>
             <a:fld id="{193A4EF1-311E-4B8E-987F-E5E4DBC981B3}" type="datetimeFigureOut">
               <a:rPr lang="es-PE" smtClean="0"/>
-              <a:t>21/08/2025</a:t>
+              <a:t>22/08/2025</a:t>
             </a:fld>
             <a:endParaRPr lang="es-PE"/>
           </a:p>
@@ -3655,7 +3655,7 @@
           <a:p>
             <a:fld id="{193A4EF1-311E-4B8E-987F-E5E4DBC981B3}" type="datetimeFigureOut">
               <a:rPr lang="es-PE" smtClean="0"/>
-              <a:t>21/08/2025</a:t>
+              <a:t>22/08/2025</a:t>
             </a:fld>
             <a:endParaRPr lang="es-PE"/>
           </a:p>
@@ -3903,7 +3903,7 @@
           <a:p>
             <a:fld id="{193A4EF1-311E-4B8E-987F-E5E4DBC981B3}" type="datetimeFigureOut">
               <a:rPr lang="es-PE" smtClean="0"/>
-              <a:t>21/08/2025</a:t>
+              <a:t>22/08/2025</a:t>
             </a:fld>
             <a:endParaRPr lang="es-PE"/>
           </a:p>
@@ -4201,7 +4201,7 @@
           <a:p>
             <a:fld id="{193A4EF1-311E-4B8E-987F-E5E4DBC981B3}" type="datetimeFigureOut">
               <a:rPr lang="es-PE" smtClean="0"/>
-              <a:t>21/08/2025</a:t>
+              <a:t>22/08/2025</a:t>
             </a:fld>
             <a:endParaRPr lang="es-PE"/>
           </a:p>
@@ -4595,7 +4595,7 @@
           <a:p>
             <a:fld id="{193A4EF1-311E-4B8E-987F-E5E4DBC981B3}" type="datetimeFigureOut">
               <a:rPr lang="es-PE" smtClean="0"/>
-              <a:t>21/08/2025</a:t>
+              <a:t>22/08/2025</a:t>
             </a:fld>
             <a:endParaRPr lang="es-PE"/>
           </a:p>
@@ -4744,7 +4744,7 @@
           <a:p>
             <a:fld id="{193A4EF1-311E-4B8E-987F-E5E4DBC981B3}" type="datetimeFigureOut">
               <a:rPr lang="es-PE" smtClean="0"/>
-              <a:t>21/08/2025</a:t>
+              <a:t>22/08/2025</a:t>
             </a:fld>
             <a:endParaRPr lang="es-PE"/>
           </a:p>
@@ -4870,7 +4870,7 @@
           <a:p>
             <a:fld id="{193A4EF1-311E-4B8E-987F-E5E4DBC981B3}" type="datetimeFigureOut">
               <a:rPr lang="es-PE" smtClean="0"/>
-              <a:t>21/08/2025</a:t>
+              <a:t>22/08/2025</a:t>
             </a:fld>
             <a:endParaRPr lang="es-PE"/>
           </a:p>
@@ -5125,7 +5125,7 @@
           <a:p>
             <a:fld id="{193A4EF1-311E-4B8E-987F-E5E4DBC981B3}" type="datetimeFigureOut">
               <a:rPr lang="es-PE" smtClean="0"/>
-              <a:t>21/08/2025</a:t>
+              <a:t>22/08/2025</a:t>
             </a:fld>
             <a:endParaRPr lang="es-PE"/>
           </a:p>
@@ -5440,7 +5440,7 @@
           <a:p>
             <a:fld id="{193A4EF1-311E-4B8E-987F-E5E4DBC981B3}" type="datetimeFigureOut">
               <a:rPr lang="es-PE" smtClean="0"/>
-              <a:t>21/08/2025</a:t>
+              <a:t>22/08/2025</a:t>
             </a:fld>
             <a:endParaRPr lang="es-PE"/>
           </a:p>
@@ -5791,7 +5791,7 @@
           <a:p>
             <a:fld id="{193A4EF1-311E-4B8E-987F-E5E4DBC981B3}" type="datetimeFigureOut">
               <a:rPr lang="es-PE" smtClean="0"/>
-              <a:t>21/08/2025</a:t>
+              <a:t>22/08/2025</a:t>
             </a:fld>
             <a:endParaRPr lang="es-PE"/>
           </a:p>
@@ -9403,6 +9403,191 @@
   <p:clrMapOvr>
     <a:masterClrMapping/>
   </p:clrMapOvr>
+  <p:timing>
+    <p:tnLst>
+      <p:par>
+        <p:cTn id="1" dur="indefinite" restart="never" nodeType="tmRoot">
+          <p:childTnLst>
+            <p:seq concurrent="1" nextAc="seek">
+              <p:cTn id="2" dur="indefinite" nodeType="mainSeq">
+                <p:childTnLst>
+                  <p:par>
+                    <p:cTn id="3" fill="hold">
+                      <p:stCondLst>
+                        <p:cond delay="indefinite"/>
+                      </p:stCondLst>
+                      <p:childTnLst>
+                        <p:par>
+                          <p:cTn id="4" fill="hold">
+                            <p:stCondLst>
+                              <p:cond delay="0"/>
+                            </p:stCondLst>
+                            <p:childTnLst>
+                              <p:par>
+                                <p:cTn id="5" presetID="10" presetClass="entr" presetSubtype="0" fill="hold" grpId="0" nodeType="clickEffect">
+                                  <p:stCondLst>
+                                    <p:cond delay="0"/>
+                                  </p:stCondLst>
+                                  <p:childTnLst>
+                                    <p:set>
+                                      <p:cBhvr>
+                                        <p:cTn id="6" dur="1" fill="hold">
+                                          <p:stCondLst>
+                                            <p:cond delay="0"/>
+                                          </p:stCondLst>
+                                        </p:cTn>
+                                        <p:tgtEl>
+                                          <p:spTgt spid="8"/>
+                                        </p:tgtEl>
+                                        <p:attrNameLst>
+                                          <p:attrName>style.visibility</p:attrName>
+                                        </p:attrNameLst>
+                                      </p:cBhvr>
+                                      <p:to>
+                                        <p:strVal val="visible"/>
+                                      </p:to>
+                                    </p:set>
+                                    <p:animEffect transition="in" filter="fade">
+                                      <p:cBhvr>
+                                        <p:cTn id="7" dur="500"/>
+                                        <p:tgtEl>
+                                          <p:spTgt spid="8"/>
+                                        </p:tgtEl>
+                                      </p:cBhvr>
+                                    </p:animEffect>
+                                  </p:childTnLst>
+                                </p:cTn>
+                              </p:par>
+                            </p:childTnLst>
+                          </p:cTn>
+                        </p:par>
+                      </p:childTnLst>
+                    </p:cTn>
+                  </p:par>
+                  <p:par>
+                    <p:cTn id="8" fill="hold">
+                      <p:stCondLst>
+                        <p:cond delay="indefinite"/>
+                      </p:stCondLst>
+                      <p:childTnLst>
+                        <p:par>
+                          <p:cTn id="9" fill="hold">
+                            <p:stCondLst>
+                              <p:cond delay="0"/>
+                            </p:stCondLst>
+                            <p:childTnLst>
+                              <p:par>
+                                <p:cTn id="10" presetID="42" presetClass="entr" presetSubtype="0" fill="hold" nodeType="clickEffect">
+                                  <p:stCondLst>
+                                    <p:cond delay="0"/>
+                                  </p:stCondLst>
+                                  <p:childTnLst>
+                                    <p:set>
+                                      <p:cBhvr>
+                                        <p:cTn id="11" dur="1" fill="hold">
+                                          <p:stCondLst>
+                                            <p:cond delay="0"/>
+                                          </p:stCondLst>
+                                        </p:cTn>
+                                        <p:tgtEl>
+                                          <p:spTgt spid="2"/>
+                                        </p:tgtEl>
+                                        <p:attrNameLst>
+                                          <p:attrName>style.visibility</p:attrName>
+                                        </p:attrNameLst>
+                                      </p:cBhvr>
+                                      <p:to>
+                                        <p:strVal val="visible"/>
+                                      </p:to>
+                                    </p:set>
+                                    <p:animEffect transition="in" filter="fade">
+                                      <p:cBhvr>
+                                        <p:cTn id="12" dur="1000"/>
+                                        <p:tgtEl>
+                                          <p:spTgt spid="2"/>
+                                        </p:tgtEl>
+                                      </p:cBhvr>
+                                    </p:animEffect>
+                                    <p:anim calcmode="lin" valueType="num">
+                                      <p:cBhvr>
+                                        <p:cTn id="13" dur="1000" fill="hold"/>
+                                        <p:tgtEl>
+                                          <p:spTgt spid="2"/>
+                                        </p:tgtEl>
+                                        <p:attrNameLst>
+                                          <p:attrName>ppt_x</p:attrName>
+                                        </p:attrNameLst>
+                                      </p:cBhvr>
+                                      <p:tavLst>
+                                        <p:tav tm="0">
+                                          <p:val>
+                                            <p:strVal val="#ppt_x"/>
+                                          </p:val>
+                                        </p:tav>
+                                        <p:tav tm="100000">
+                                          <p:val>
+                                            <p:strVal val="#ppt_x"/>
+                                          </p:val>
+                                        </p:tav>
+                                      </p:tavLst>
+                                    </p:anim>
+                                    <p:anim calcmode="lin" valueType="num">
+                                      <p:cBhvr>
+                                        <p:cTn id="14" dur="1000" fill="hold"/>
+                                        <p:tgtEl>
+                                          <p:spTgt spid="2"/>
+                                        </p:tgtEl>
+                                        <p:attrNameLst>
+                                          <p:attrName>ppt_y</p:attrName>
+                                        </p:attrNameLst>
+                                      </p:cBhvr>
+                                      <p:tavLst>
+                                        <p:tav tm="0">
+                                          <p:val>
+                                            <p:strVal val="#ppt_y+.1"/>
+                                          </p:val>
+                                        </p:tav>
+                                        <p:tav tm="100000">
+                                          <p:val>
+                                            <p:strVal val="#ppt_y"/>
+                                          </p:val>
+                                        </p:tav>
+                                      </p:tavLst>
+                                    </p:anim>
+                                  </p:childTnLst>
+                                </p:cTn>
+                              </p:par>
+                            </p:childTnLst>
+                          </p:cTn>
+                        </p:par>
+                      </p:childTnLst>
+                    </p:cTn>
+                  </p:par>
+                </p:childTnLst>
+              </p:cTn>
+              <p:prevCondLst>
+                <p:cond evt="onPrev" delay="0">
+                  <p:tgtEl>
+                    <p:sldTgt/>
+                  </p:tgtEl>
+                </p:cond>
+              </p:prevCondLst>
+              <p:nextCondLst>
+                <p:cond evt="onNext" delay="0">
+                  <p:tgtEl>
+                    <p:sldTgt/>
+                  </p:tgtEl>
+                </p:cond>
+              </p:nextCondLst>
+            </p:seq>
+          </p:childTnLst>
+        </p:cTn>
+      </p:par>
+    </p:tnLst>
+    <p:bldLst>
+      <p:bldP spid="8" grpId="0"/>
+    </p:bldLst>
+  </p:timing>
 </p:sld>
 </file>
 
@@ -9441,7 +9626,7 @@
         </p:nvSpPr>
         <p:spPr>
           <a:xfrm>
-            <a:off x="1995054" y="91313"/>
+            <a:off x="1871764" y="1129003"/>
             <a:ext cx="7254875" cy="407987"/>
           </a:xfrm>
         </p:spPr>
@@ -9472,8 +9657,8 @@
         </p:nvSpPr>
         <p:spPr>
           <a:xfrm>
-            <a:off x="1207839" y="1120025"/>
-            <a:ext cx="8829303" cy="2031325"/>
+            <a:off x="1474967" y="1890587"/>
+            <a:ext cx="8829303" cy="2862322"/>
           </a:xfrm>
           <a:prstGeom prst="rect">
             <a:avLst/>
@@ -9486,6 +9671,11 @@
           </a:bodyPr>
           <a:lstStyle/>
           <a:p>
+            <a:pPr algn="just">
+              <a:lnSpc>
+                <a:spcPct val="150000"/>
+              </a:lnSpc>
+            </a:pPr>
             <a:r>
               <a:rPr lang="es-PE" sz="1800" dirty="0">
                 <a:effectLst/>
@@ -9496,29 +9686,18 @@
             </a:r>
           </a:p>
           <a:p>
+            <a:pPr algn="just">
+              <a:lnSpc>
+                <a:spcPct val="150000"/>
+              </a:lnSpc>
+            </a:pPr>
             <a:r>
               <a:rPr lang="es-PE" sz="1800" dirty="0">
                 <a:effectLst/>
                 <a:latin typeface="Arial" panose="020B0604020202020204" pitchFamily="34" charset="0"/>
                 <a:ea typeface="Calibri" panose="020F0502020204030204" pitchFamily="34" charset="0"/>
               </a:rPr>
-              <a:t>Esta investigación contribuye al cumplimiento del </a:t>
-            </a:r>
-            <a:r>
-              <a:rPr lang="es-PE" sz="1800" b="1" dirty="0">
-                <a:effectLst/>
-                <a:latin typeface="Arial" panose="020B0604020202020204" pitchFamily="34" charset="0"/>
-                <a:ea typeface="Calibri" panose="020F0502020204030204" pitchFamily="34" charset="0"/>
-              </a:rPr>
-              <a:t>ODS 11: Ciudades y comunidades sostenibles</a:t>
-            </a:r>
-            <a:r>
-              <a:rPr lang="es-PE" sz="1800" dirty="0">
-                <a:effectLst/>
-                <a:latin typeface="Arial" panose="020B0604020202020204" pitchFamily="34" charset="0"/>
-                <a:ea typeface="Calibri" panose="020F0502020204030204" pitchFamily="34" charset="0"/>
-              </a:rPr>
-              <a:t>, al promover una recaudación eficiente para el desarrollo urbano y la mejora de los servicios públicos</a:t>
+              <a:t>Esta investigación contribuye al cumplimiento del ODS 11: Ciudades y comunidades sostenibles, al promover una recaudación eficiente para el desarrollo urbano y la mejora de los servicios públicos</a:t>
             </a:r>
             <a:r>
               <a:rPr lang="es-PE" dirty="0">
@@ -9762,6 +9941,383 @@
   <p:clrMapOvr>
     <a:masterClrMapping/>
   </p:clrMapOvr>
+  <p:timing>
+    <p:tnLst>
+      <p:par>
+        <p:cTn id="1" dur="indefinite" restart="never" nodeType="tmRoot">
+          <p:childTnLst>
+            <p:seq concurrent="1" nextAc="seek">
+              <p:cTn id="2" dur="indefinite" nodeType="mainSeq">
+                <p:childTnLst>
+                  <p:par>
+                    <p:cTn id="3" fill="hold">
+                      <p:stCondLst>
+                        <p:cond delay="indefinite"/>
+                      </p:stCondLst>
+                      <p:childTnLst>
+                        <p:par>
+                          <p:cTn id="4" fill="hold">
+                            <p:stCondLst>
+                              <p:cond delay="0"/>
+                            </p:stCondLst>
+                            <p:childTnLst>
+                              <p:par>
+                                <p:cTn id="5" presetID="10" presetClass="entr" presetSubtype="0" fill="hold" grpId="0" nodeType="clickEffect">
+                                  <p:stCondLst>
+                                    <p:cond delay="0"/>
+                                  </p:stCondLst>
+                                  <p:childTnLst>
+                                    <p:set>
+                                      <p:cBhvr>
+                                        <p:cTn id="6" dur="1" fill="hold">
+                                          <p:stCondLst>
+                                            <p:cond delay="0"/>
+                                          </p:stCondLst>
+                                        </p:cTn>
+                                        <p:tgtEl>
+                                          <p:spTgt spid="8"/>
+                                        </p:tgtEl>
+                                        <p:attrNameLst>
+                                          <p:attrName>style.visibility</p:attrName>
+                                        </p:attrNameLst>
+                                      </p:cBhvr>
+                                      <p:to>
+                                        <p:strVal val="visible"/>
+                                      </p:to>
+                                    </p:set>
+                                    <p:animEffect transition="in" filter="fade">
+                                      <p:cBhvr>
+                                        <p:cTn id="7" dur="500"/>
+                                        <p:tgtEl>
+                                          <p:spTgt spid="8"/>
+                                        </p:tgtEl>
+                                      </p:cBhvr>
+                                    </p:animEffect>
+                                  </p:childTnLst>
+                                </p:cTn>
+                              </p:par>
+                            </p:childTnLst>
+                          </p:cTn>
+                        </p:par>
+                      </p:childTnLst>
+                    </p:cTn>
+                  </p:par>
+                  <p:par>
+                    <p:cTn id="8" fill="hold">
+                      <p:stCondLst>
+                        <p:cond delay="indefinite"/>
+                      </p:stCondLst>
+                      <p:childTnLst>
+                        <p:par>
+                          <p:cTn id="9" fill="hold">
+                            <p:stCondLst>
+                              <p:cond delay="0"/>
+                            </p:stCondLst>
+                            <p:childTnLst>
+                              <p:par>
+                                <p:cTn id="10" presetID="42" presetClass="entr" presetSubtype="0" fill="hold" grpId="0" nodeType="clickEffect">
+                                  <p:stCondLst>
+                                    <p:cond delay="0"/>
+                                  </p:stCondLst>
+                                  <p:childTnLst>
+                                    <p:set>
+                                      <p:cBhvr>
+                                        <p:cTn id="11" dur="1" fill="hold">
+                                          <p:stCondLst>
+                                            <p:cond delay="0"/>
+                                          </p:stCondLst>
+                                        </p:cTn>
+                                        <p:tgtEl>
+                                          <p:spTgt spid="4"/>
+                                        </p:tgtEl>
+                                        <p:attrNameLst>
+                                          <p:attrName>style.visibility</p:attrName>
+                                        </p:attrNameLst>
+                                      </p:cBhvr>
+                                      <p:to>
+                                        <p:strVal val="visible"/>
+                                      </p:to>
+                                    </p:set>
+                                    <p:animEffect transition="in" filter="fade">
+                                      <p:cBhvr>
+                                        <p:cTn id="12" dur="1000"/>
+                                        <p:tgtEl>
+                                          <p:spTgt spid="4"/>
+                                        </p:tgtEl>
+                                      </p:cBhvr>
+                                    </p:animEffect>
+                                    <p:anim calcmode="lin" valueType="num">
+                                      <p:cBhvr>
+                                        <p:cTn id="13" dur="1000" fill="hold"/>
+                                        <p:tgtEl>
+                                          <p:spTgt spid="4"/>
+                                        </p:tgtEl>
+                                        <p:attrNameLst>
+                                          <p:attrName>ppt_x</p:attrName>
+                                        </p:attrNameLst>
+                                      </p:cBhvr>
+                                      <p:tavLst>
+                                        <p:tav tm="0">
+                                          <p:val>
+                                            <p:strVal val="#ppt_x"/>
+                                          </p:val>
+                                        </p:tav>
+                                        <p:tav tm="100000">
+                                          <p:val>
+                                            <p:strVal val="#ppt_x"/>
+                                          </p:val>
+                                        </p:tav>
+                                      </p:tavLst>
+                                    </p:anim>
+                                    <p:anim calcmode="lin" valueType="num">
+                                      <p:cBhvr>
+                                        <p:cTn id="14" dur="1000" fill="hold"/>
+                                        <p:tgtEl>
+                                          <p:spTgt spid="4"/>
+                                        </p:tgtEl>
+                                        <p:attrNameLst>
+                                          <p:attrName>ppt_y</p:attrName>
+                                        </p:attrNameLst>
+                                      </p:cBhvr>
+                                      <p:tavLst>
+                                        <p:tav tm="0">
+                                          <p:val>
+                                            <p:strVal val="#ppt_y+.1"/>
+                                          </p:val>
+                                        </p:tav>
+                                        <p:tav tm="100000">
+                                          <p:val>
+                                            <p:strVal val="#ppt_y"/>
+                                          </p:val>
+                                        </p:tav>
+                                      </p:tavLst>
+                                    </p:anim>
+                                  </p:childTnLst>
+                                </p:cTn>
+                              </p:par>
+                            </p:childTnLst>
+                          </p:cTn>
+                        </p:par>
+                      </p:childTnLst>
+                    </p:cTn>
+                  </p:par>
+                  <p:par>
+                    <p:cTn id="15" fill="hold">
+                      <p:stCondLst>
+                        <p:cond delay="indefinite"/>
+                      </p:stCondLst>
+                      <p:childTnLst>
+                        <p:par>
+                          <p:cTn id="16" fill="hold">
+                            <p:stCondLst>
+                              <p:cond delay="0"/>
+                            </p:stCondLst>
+                            <p:childTnLst>
+                              <p:par>
+                                <p:cTn id="17" presetID="42" presetClass="entr" presetSubtype="0" fill="hold" grpId="0" nodeType="clickEffect">
+                                  <p:stCondLst>
+                                    <p:cond delay="0"/>
+                                  </p:stCondLst>
+                                  <p:childTnLst>
+                                    <p:set>
+                                      <p:cBhvr>
+                                        <p:cTn id="18" dur="1" fill="hold">
+                                          <p:stCondLst>
+                                            <p:cond delay="0"/>
+                                          </p:stCondLst>
+                                        </p:cTn>
+                                        <p:tgtEl>
+                                          <p:spTgt spid="7"/>
+                                        </p:tgtEl>
+                                        <p:attrNameLst>
+                                          <p:attrName>style.visibility</p:attrName>
+                                        </p:attrNameLst>
+                                      </p:cBhvr>
+                                      <p:to>
+                                        <p:strVal val="visible"/>
+                                      </p:to>
+                                    </p:set>
+                                    <p:animEffect transition="in" filter="fade">
+                                      <p:cBhvr>
+                                        <p:cTn id="19" dur="1000"/>
+                                        <p:tgtEl>
+                                          <p:spTgt spid="7"/>
+                                        </p:tgtEl>
+                                      </p:cBhvr>
+                                    </p:animEffect>
+                                    <p:anim calcmode="lin" valueType="num">
+                                      <p:cBhvr>
+                                        <p:cTn id="20" dur="1000" fill="hold"/>
+                                        <p:tgtEl>
+                                          <p:spTgt spid="7"/>
+                                        </p:tgtEl>
+                                        <p:attrNameLst>
+                                          <p:attrName>ppt_x</p:attrName>
+                                        </p:attrNameLst>
+                                      </p:cBhvr>
+                                      <p:tavLst>
+                                        <p:tav tm="0">
+                                          <p:val>
+                                            <p:strVal val="#ppt_x"/>
+                                          </p:val>
+                                        </p:tav>
+                                        <p:tav tm="100000">
+                                          <p:val>
+                                            <p:strVal val="#ppt_x"/>
+                                          </p:val>
+                                        </p:tav>
+                                      </p:tavLst>
+                                    </p:anim>
+                                    <p:anim calcmode="lin" valueType="num">
+                                      <p:cBhvr>
+                                        <p:cTn id="21" dur="1000" fill="hold"/>
+                                        <p:tgtEl>
+                                          <p:spTgt spid="7"/>
+                                        </p:tgtEl>
+                                        <p:attrNameLst>
+                                          <p:attrName>ppt_y</p:attrName>
+                                        </p:attrNameLst>
+                                      </p:cBhvr>
+                                      <p:tavLst>
+                                        <p:tav tm="0">
+                                          <p:val>
+                                            <p:strVal val="#ppt_y+.1"/>
+                                          </p:val>
+                                        </p:tav>
+                                        <p:tav tm="100000">
+                                          <p:val>
+                                            <p:strVal val="#ppt_y"/>
+                                          </p:val>
+                                        </p:tav>
+                                      </p:tavLst>
+                                    </p:anim>
+                                  </p:childTnLst>
+                                </p:cTn>
+                              </p:par>
+                            </p:childTnLst>
+                          </p:cTn>
+                        </p:par>
+                      </p:childTnLst>
+                    </p:cTn>
+                  </p:par>
+                  <p:par>
+                    <p:cTn id="22" fill="hold">
+                      <p:stCondLst>
+                        <p:cond delay="indefinite"/>
+                      </p:stCondLst>
+                      <p:childTnLst>
+                        <p:par>
+                          <p:cTn id="23" fill="hold">
+                            <p:stCondLst>
+                              <p:cond delay="0"/>
+                            </p:stCondLst>
+                            <p:childTnLst>
+                              <p:par>
+                                <p:cTn id="24" presetID="2" presetClass="entr" presetSubtype="4" fill="hold" nodeType="clickEffect">
+                                  <p:stCondLst>
+                                    <p:cond delay="0"/>
+                                  </p:stCondLst>
+                                  <p:childTnLst>
+                                    <p:set>
+                                      <p:cBhvr>
+                                        <p:cTn id="25" dur="1" fill="hold">
+                                          <p:stCondLst>
+                                            <p:cond delay="0"/>
+                                          </p:stCondLst>
+                                        </p:cTn>
+                                        <p:tgtEl>
+                                          <p:spTgt spid="5"/>
+                                        </p:tgtEl>
+                                        <p:attrNameLst>
+                                          <p:attrName>style.visibility</p:attrName>
+                                        </p:attrNameLst>
+                                      </p:cBhvr>
+                                      <p:to>
+                                        <p:strVal val="visible"/>
+                                      </p:to>
+                                    </p:set>
+                                    <p:anim calcmode="lin" valueType="num">
+                                      <p:cBhvr additive="base">
+                                        <p:cTn id="26" dur="500" fill="hold"/>
+                                        <p:tgtEl>
+                                          <p:spTgt spid="5"/>
+                                        </p:tgtEl>
+                                        <p:attrNameLst>
+                                          <p:attrName>ppt_x</p:attrName>
+                                        </p:attrNameLst>
+                                      </p:cBhvr>
+                                      <p:tavLst>
+                                        <p:tav tm="0">
+                                          <p:val>
+                                            <p:strVal val="#ppt_x"/>
+                                          </p:val>
+                                        </p:tav>
+                                        <p:tav tm="100000">
+                                          <p:val>
+                                            <p:strVal val="#ppt_x"/>
+                                          </p:val>
+                                        </p:tav>
+                                      </p:tavLst>
+                                    </p:anim>
+                                    <p:anim calcmode="lin" valueType="num">
+                                      <p:cBhvr additive="base">
+                                        <p:cTn id="27" dur="500" fill="hold"/>
+                                        <p:tgtEl>
+                                          <p:spTgt spid="5"/>
+                                        </p:tgtEl>
+                                        <p:attrNameLst>
+                                          <p:attrName>ppt_y</p:attrName>
+                                        </p:attrNameLst>
+                                      </p:cBhvr>
+                                      <p:tavLst>
+                                        <p:tav tm="0">
+                                          <p:val>
+                                            <p:strVal val="1+#ppt_h/2"/>
+                                          </p:val>
+                                        </p:tav>
+                                        <p:tav tm="100000">
+                                          <p:val>
+                                            <p:strVal val="#ppt_y"/>
+                                          </p:val>
+                                        </p:tav>
+                                      </p:tavLst>
+                                    </p:anim>
+                                  </p:childTnLst>
+                                </p:cTn>
+                              </p:par>
+                            </p:childTnLst>
+                          </p:cTn>
+                        </p:par>
+                      </p:childTnLst>
+                    </p:cTn>
+                  </p:par>
+                </p:childTnLst>
+              </p:cTn>
+              <p:prevCondLst>
+                <p:cond evt="onPrev" delay="0">
+                  <p:tgtEl>
+                    <p:sldTgt/>
+                  </p:tgtEl>
+                </p:cond>
+              </p:prevCondLst>
+              <p:nextCondLst>
+                <p:cond evt="onNext" delay="0">
+                  <p:tgtEl>
+                    <p:sldTgt/>
+                  </p:tgtEl>
+                </p:cond>
+              </p:nextCondLst>
+            </p:seq>
+          </p:childTnLst>
+        </p:cTn>
+      </p:par>
+    </p:tnLst>
+    <p:bldLst>
+      <p:bldP spid="8" grpId="0"/>
+      <p:bldP spid="4" grpId="0"/>
+      <p:bldP spid="7" grpId="0"/>
+    </p:bldLst>
+  </p:timing>
 </p:sld>
 </file>
 
@@ -9981,6 +10537,337 @@
   <p:clrMapOvr>
     <a:masterClrMapping/>
   </p:clrMapOvr>
+  <p:timing>
+    <p:tnLst>
+      <p:par>
+        <p:cTn id="1" dur="indefinite" restart="never" nodeType="tmRoot">
+          <p:childTnLst>
+            <p:seq concurrent="1" nextAc="seek">
+              <p:cTn id="2" dur="indefinite" nodeType="mainSeq">
+                <p:childTnLst>
+                  <p:par>
+                    <p:cTn id="3" fill="hold">
+                      <p:stCondLst>
+                        <p:cond delay="indefinite"/>
+                      </p:stCondLst>
+                      <p:childTnLst>
+                        <p:par>
+                          <p:cTn id="4" fill="hold">
+                            <p:stCondLst>
+                              <p:cond delay="0"/>
+                            </p:stCondLst>
+                            <p:childTnLst>
+                              <p:par>
+                                <p:cTn id="5" presetID="10" presetClass="entr" presetSubtype="0" fill="hold" grpId="0" nodeType="clickEffect">
+                                  <p:stCondLst>
+                                    <p:cond delay="0"/>
+                                  </p:stCondLst>
+                                  <p:childTnLst>
+                                    <p:set>
+                                      <p:cBhvr>
+                                        <p:cTn id="6" dur="1" fill="hold">
+                                          <p:stCondLst>
+                                            <p:cond delay="0"/>
+                                          </p:stCondLst>
+                                        </p:cTn>
+                                        <p:tgtEl>
+                                          <p:spTgt spid="8"/>
+                                        </p:tgtEl>
+                                        <p:attrNameLst>
+                                          <p:attrName>style.visibility</p:attrName>
+                                        </p:attrNameLst>
+                                      </p:cBhvr>
+                                      <p:to>
+                                        <p:strVal val="visible"/>
+                                      </p:to>
+                                    </p:set>
+                                    <p:animEffect transition="in" filter="fade">
+                                      <p:cBhvr>
+                                        <p:cTn id="7" dur="500"/>
+                                        <p:tgtEl>
+                                          <p:spTgt spid="8"/>
+                                        </p:tgtEl>
+                                      </p:cBhvr>
+                                    </p:animEffect>
+                                  </p:childTnLst>
+                                </p:cTn>
+                              </p:par>
+                            </p:childTnLst>
+                          </p:cTn>
+                        </p:par>
+                      </p:childTnLst>
+                    </p:cTn>
+                  </p:par>
+                  <p:par>
+                    <p:cTn id="8" fill="hold">
+                      <p:stCondLst>
+                        <p:cond delay="indefinite"/>
+                      </p:stCondLst>
+                      <p:childTnLst>
+                        <p:par>
+                          <p:cTn id="9" fill="hold">
+                            <p:stCondLst>
+                              <p:cond delay="0"/>
+                            </p:stCondLst>
+                            <p:childTnLst>
+                              <p:par>
+                                <p:cTn id="10" presetID="2" presetClass="entr" presetSubtype="4" fill="hold" grpId="0" nodeType="clickEffect">
+                                  <p:stCondLst>
+                                    <p:cond delay="0"/>
+                                  </p:stCondLst>
+                                  <p:childTnLst>
+                                    <p:set>
+                                      <p:cBhvr>
+                                        <p:cTn id="11" dur="1" fill="hold">
+                                          <p:stCondLst>
+                                            <p:cond delay="0"/>
+                                          </p:stCondLst>
+                                        </p:cTn>
+                                        <p:tgtEl>
+                                          <p:spTgt spid="4"/>
+                                        </p:tgtEl>
+                                        <p:attrNameLst>
+                                          <p:attrName>style.visibility</p:attrName>
+                                        </p:attrNameLst>
+                                      </p:cBhvr>
+                                      <p:to>
+                                        <p:strVal val="visible"/>
+                                      </p:to>
+                                    </p:set>
+                                    <p:anim calcmode="lin" valueType="num">
+                                      <p:cBhvr additive="base">
+                                        <p:cTn id="12" dur="500" fill="hold"/>
+                                        <p:tgtEl>
+                                          <p:spTgt spid="4"/>
+                                        </p:tgtEl>
+                                        <p:attrNameLst>
+                                          <p:attrName>ppt_x</p:attrName>
+                                        </p:attrNameLst>
+                                      </p:cBhvr>
+                                      <p:tavLst>
+                                        <p:tav tm="0">
+                                          <p:val>
+                                            <p:strVal val="#ppt_x"/>
+                                          </p:val>
+                                        </p:tav>
+                                        <p:tav tm="100000">
+                                          <p:val>
+                                            <p:strVal val="#ppt_x"/>
+                                          </p:val>
+                                        </p:tav>
+                                      </p:tavLst>
+                                    </p:anim>
+                                    <p:anim calcmode="lin" valueType="num">
+                                      <p:cBhvr additive="base">
+                                        <p:cTn id="13" dur="500" fill="hold"/>
+                                        <p:tgtEl>
+                                          <p:spTgt spid="4"/>
+                                        </p:tgtEl>
+                                        <p:attrNameLst>
+                                          <p:attrName>ppt_y</p:attrName>
+                                        </p:attrNameLst>
+                                      </p:cBhvr>
+                                      <p:tavLst>
+                                        <p:tav tm="0">
+                                          <p:val>
+                                            <p:strVal val="1+#ppt_h/2"/>
+                                          </p:val>
+                                        </p:tav>
+                                        <p:tav tm="100000">
+                                          <p:val>
+                                            <p:strVal val="#ppt_y"/>
+                                          </p:val>
+                                        </p:tav>
+                                      </p:tavLst>
+                                    </p:anim>
+                                  </p:childTnLst>
+                                </p:cTn>
+                              </p:par>
+                            </p:childTnLst>
+                          </p:cTn>
+                        </p:par>
+                      </p:childTnLst>
+                    </p:cTn>
+                  </p:par>
+                  <p:par>
+                    <p:cTn id="14" fill="hold">
+                      <p:stCondLst>
+                        <p:cond delay="indefinite"/>
+                      </p:stCondLst>
+                      <p:childTnLst>
+                        <p:par>
+                          <p:cTn id="15" fill="hold">
+                            <p:stCondLst>
+                              <p:cond delay="0"/>
+                            </p:stCondLst>
+                            <p:childTnLst>
+                              <p:par>
+                                <p:cTn id="16" presetID="10" presetClass="entr" presetSubtype="0" fill="hold" grpId="0" nodeType="clickEffect">
+                                  <p:stCondLst>
+                                    <p:cond delay="0"/>
+                                  </p:stCondLst>
+                                  <p:childTnLst>
+                                    <p:set>
+                                      <p:cBhvr>
+                                        <p:cTn id="17" dur="1" fill="hold">
+                                          <p:stCondLst>
+                                            <p:cond delay="0"/>
+                                          </p:stCondLst>
+                                        </p:cTn>
+                                        <p:tgtEl>
+                                          <p:spTgt spid="6"/>
+                                        </p:tgtEl>
+                                        <p:attrNameLst>
+                                          <p:attrName>style.visibility</p:attrName>
+                                        </p:attrNameLst>
+                                      </p:cBhvr>
+                                      <p:to>
+                                        <p:strVal val="visible"/>
+                                      </p:to>
+                                    </p:set>
+                                    <p:animEffect transition="in" filter="fade">
+                                      <p:cBhvr>
+                                        <p:cTn id="18" dur="500"/>
+                                        <p:tgtEl>
+                                          <p:spTgt spid="6"/>
+                                        </p:tgtEl>
+                                      </p:cBhvr>
+                                    </p:animEffect>
+                                  </p:childTnLst>
+                                </p:cTn>
+                              </p:par>
+                            </p:childTnLst>
+                          </p:cTn>
+                        </p:par>
+                      </p:childTnLst>
+                    </p:cTn>
+                  </p:par>
+                  <p:par>
+                    <p:cTn id="19" fill="hold">
+                      <p:stCondLst>
+                        <p:cond delay="indefinite"/>
+                      </p:stCondLst>
+                      <p:childTnLst>
+                        <p:par>
+                          <p:cTn id="20" fill="hold">
+                            <p:stCondLst>
+                              <p:cond delay="0"/>
+                            </p:stCondLst>
+                            <p:childTnLst>
+                              <p:par>
+                                <p:cTn id="21" presetID="42" presetClass="entr" presetSubtype="0" fill="hold" nodeType="clickEffect">
+                                  <p:stCondLst>
+                                    <p:cond delay="0"/>
+                                  </p:stCondLst>
+                                  <p:childTnLst>
+                                    <p:set>
+                                      <p:cBhvr>
+                                        <p:cTn id="22" dur="1" fill="hold">
+                                          <p:stCondLst>
+                                            <p:cond delay="0"/>
+                                          </p:stCondLst>
+                                        </p:cTn>
+                                        <p:tgtEl>
+                                          <p:spTgt spid="2"/>
+                                        </p:tgtEl>
+                                        <p:attrNameLst>
+                                          <p:attrName>style.visibility</p:attrName>
+                                        </p:attrNameLst>
+                                      </p:cBhvr>
+                                      <p:to>
+                                        <p:strVal val="visible"/>
+                                      </p:to>
+                                    </p:set>
+                                    <p:animEffect transition="in" filter="fade">
+                                      <p:cBhvr>
+                                        <p:cTn id="23" dur="1000"/>
+                                        <p:tgtEl>
+                                          <p:spTgt spid="2"/>
+                                        </p:tgtEl>
+                                      </p:cBhvr>
+                                    </p:animEffect>
+                                    <p:anim calcmode="lin" valueType="num">
+                                      <p:cBhvr>
+                                        <p:cTn id="24" dur="1000" fill="hold"/>
+                                        <p:tgtEl>
+                                          <p:spTgt spid="2"/>
+                                        </p:tgtEl>
+                                        <p:attrNameLst>
+                                          <p:attrName>ppt_x</p:attrName>
+                                        </p:attrNameLst>
+                                      </p:cBhvr>
+                                      <p:tavLst>
+                                        <p:tav tm="0">
+                                          <p:val>
+                                            <p:strVal val="#ppt_x"/>
+                                          </p:val>
+                                        </p:tav>
+                                        <p:tav tm="100000">
+                                          <p:val>
+                                            <p:strVal val="#ppt_x"/>
+                                          </p:val>
+                                        </p:tav>
+                                      </p:tavLst>
+                                    </p:anim>
+                                    <p:anim calcmode="lin" valueType="num">
+                                      <p:cBhvr>
+                                        <p:cTn id="25" dur="1000" fill="hold"/>
+                                        <p:tgtEl>
+                                          <p:spTgt spid="2"/>
+                                        </p:tgtEl>
+                                        <p:attrNameLst>
+                                          <p:attrName>ppt_y</p:attrName>
+                                        </p:attrNameLst>
+                                      </p:cBhvr>
+                                      <p:tavLst>
+                                        <p:tav tm="0">
+                                          <p:val>
+                                            <p:strVal val="#ppt_y+.1"/>
+                                          </p:val>
+                                        </p:tav>
+                                        <p:tav tm="100000">
+                                          <p:val>
+                                            <p:strVal val="#ppt_y"/>
+                                          </p:val>
+                                        </p:tav>
+                                      </p:tavLst>
+                                    </p:anim>
+                                  </p:childTnLst>
+                                </p:cTn>
+                              </p:par>
+                            </p:childTnLst>
+                          </p:cTn>
+                        </p:par>
+                      </p:childTnLst>
+                    </p:cTn>
+                  </p:par>
+                </p:childTnLst>
+              </p:cTn>
+              <p:prevCondLst>
+                <p:cond evt="onPrev" delay="0">
+                  <p:tgtEl>
+                    <p:sldTgt/>
+                  </p:tgtEl>
+                </p:cond>
+              </p:prevCondLst>
+              <p:nextCondLst>
+                <p:cond evt="onNext" delay="0">
+                  <p:tgtEl>
+                    <p:sldTgt/>
+                  </p:tgtEl>
+                </p:cond>
+              </p:nextCondLst>
+            </p:seq>
+          </p:childTnLst>
+        </p:cTn>
+      </p:par>
+    </p:tnLst>
+    <p:bldLst>
+      <p:bldP spid="8" grpId="0"/>
+      <p:bldP spid="4" grpId="0"/>
+      <p:bldP spid="6" grpId="0"/>
+    </p:bldLst>
+  </p:timing>
 </p:sld>
 </file>
 
@@ -10220,6 +11107,337 @@
   <p:clrMapOvr>
     <a:masterClrMapping/>
   </p:clrMapOvr>
+  <p:timing>
+    <p:tnLst>
+      <p:par>
+        <p:cTn id="1" dur="indefinite" restart="never" nodeType="tmRoot">
+          <p:childTnLst>
+            <p:seq concurrent="1" nextAc="seek">
+              <p:cTn id="2" dur="indefinite" nodeType="mainSeq">
+                <p:childTnLst>
+                  <p:par>
+                    <p:cTn id="3" fill="hold">
+                      <p:stCondLst>
+                        <p:cond delay="indefinite"/>
+                      </p:stCondLst>
+                      <p:childTnLst>
+                        <p:par>
+                          <p:cTn id="4" fill="hold">
+                            <p:stCondLst>
+                              <p:cond delay="0"/>
+                            </p:stCondLst>
+                            <p:childTnLst>
+                              <p:par>
+                                <p:cTn id="5" presetID="10" presetClass="entr" presetSubtype="0" fill="hold" grpId="0" nodeType="clickEffect">
+                                  <p:stCondLst>
+                                    <p:cond delay="0"/>
+                                  </p:stCondLst>
+                                  <p:childTnLst>
+                                    <p:set>
+                                      <p:cBhvr>
+                                        <p:cTn id="6" dur="1" fill="hold">
+                                          <p:stCondLst>
+                                            <p:cond delay="0"/>
+                                          </p:stCondLst>
+                                        </p:cTn>
+                                        <p:tgtEl>
+                                          <p:spTgt spid="8"/>
+                                        </p:tgtEl>
+                                        <p:attrNameLst>
+                                          <p:attrName>style.visibility</p:attrName>
+                                        </p:attrNameLst>
+                                      </p:cBhvr>
+                                      <p:to>
+                                        <p:strVal val="visible"/>
+                                      </p:to>
+                                    </p:set>
+                                    <p:animEffect transition="in" filter="fade">
+                                      <p:cBhvr>
+                                        <p:cTn id="7" dur="500"/>
+                                        <p:tgtEl>
+                                          <p:spTgt spid="8"/>
+                                        </p:tgtEl>
+                                      </p:cBhvr>
+                                    </p:animEffect>
+                                  </p:childTnLst>
+                                </p:cTn>
+                              </p:par>
+                            </p:childTnLst>
+                          </p:cTn>
+                        </p:par>
+                      </p:childTnLst>
+                    </p:cTn>
+                  </p:par>
+                  <p:par>
+                    <p:cTn id="8" fill="hold">
+                      <p:stCondLst>
+                        <p:cond delay="indefinite"/>
+                      </p:stCondLst>
+                      <p:childTnLst>
+                        <p:par>
+                          <p:cTn id="9" fill="hold">
+                            <p:stCondLst>
+                              <p:cond delay="0"/>
+                            </p:stCondLst>
+                            <p:childTnLst>
+                              <p:par>
+                                <p:cTn id="10" presetID="2" presetClass="entr" presetSubtype="4" fill="hold" grpId="0" nodeType="clickEffect">
+                                  <p:stCondLst>
+                                    <p:cond delay="0"/>
+                                  </p:stCondLst>
+                                  <p:childTnLst>
+                                    <p:set>
+                                      <p:cBhvr>
+                                        <p:cTn id="11" dur="1" fill="hold">
+                                          <p:stCondLst>
+                                            <p:cond delay="0"/>
+                                          </p:stCondLst>
+                                        </p:cTn>
+                                        <p:tgtEl>
+                                          <p:spTgt spid="4"/>
+                                        </p:tgtEl>
+                                        <p:attrNameLst>
+                                          <p:attrName>style.visibility</p:attrName>
+                                        </p:attrNameLst>
+                                      </p:cBhvr>
+                                      <p:to>
+                                        <p:strVal val="visible"/>
+                                      </p:to>
+                                    </p:set>
+                                    <p:anim calcmode="lin" valueType="num">
+                                      <p:cBhvr additive="base">
+                                        <p:cTn id="12" dur="500" fill="hold"/>
+                                        <p:tgtEl>
+                                          <p:spTgt spid="4"/>
+                                        </p:tgtEl>
+                                        <p:attrNameLst>
+                                          <p:attrName>ppt_x</p:attrName>
+                                        </p:attrNameLst>
+                                      </p:cBhvr>
+                                      <p:tavLst>
+                                        <p:tav tm="0">
+                                          <p:val>
+                                            <p:strVal val="#ppt_x"/>
+                                          </p:val>
+                                        </p:tav>
+                                        <p:tav tm="100000">
+                                          <p:val>
+                                            <p:strVal val="#ppt_x"/>
+                                          </p:val>
+                                        </p:tav>
+                                      </p:tavLst>
+                                    </p:anim>
+                                    <p:anim calcmode="lin" valueType="num">
+                                      <p:cBhvr additive="base">
+                                        <p:cTn id="13" dur="500" fill="hold"/>
+                                        <p:tgtEl>
+                                          <p:spTgt spid="4"/>
+                                        </p:tgtEl>
+                                        <p:attrNameLst>
+                                          <p:attrName>ppt_y</p:attrName>
+                                        </p:attrNameLst>
+                                      </p:cBhvr>
+                                      <p:tavLst>
+                                        <p:tav tm="0">
+                                          <p:val>
+                                            <p:strVal val="1+#ppt_h/2"/>
+                                          </p:val>
+                                        </p:tav>
+                                        <p:tav tm="100000">
+                                          <p:val>
+                                            <p:strVal val="#ppt_y"/>
+                                          </p:val>
+                                        </p:tav>
+                                      </p:tavLst>
+                                    </p:anim>
+                                  </p:childTnLst>
+                                </p:cTn>
+                              </p:par>
+                            </p:childTnLst>
+                          </p:cTn>
+                        </p:par>
+                      </p:childTnLst>
+                    </p:cTn>
+                  </p:par>
+                  <p:par>
+                    <p:cTn id="14" fill="hold">
+                      <p:stCondLst>
+                        <p:cond delay="indefinite"/>
+                      </p:stCondLst>
+                      <p:childTnLst>
+                        <p:par>
+                          <p:cTn id="15" fill="hold">
+                            <p:stCondLst>
+                              <p:cond delay="0"/>
+                            </p:stCondLst>
+                            <p:childTnLst>
+                              <p:par>
+                                <p:cTn id="16" presetID="10" presetClass="entr" presetSubtype="0" fill="hold" grpId="0" nodeType="clickEffect">
+                                  <p:stCondLst>
+                                    <p:cond delay="0"/>
+                                  </p:stCondLst>
+                                  <p:childTnLst>
+                                    <p:set>
+                                      <p:cBhvr>
+                                        <p:cTn id="17" dur="1" fill="hold">
+                                          <p:stCondLst>
+                                            <p:cond delay="0"/>
+                                          </p:stCondLst>
+                                        </p:cTn>
+                                        <p:tgtEl>
+                                          <p:spTgt spid="6"/>
+                                        </p:tgtEl>
+                                        <p:attrNameLst>
+                                          <p:attrName>style.visibility</p:attrName>
+                                        </p:attrNameLst>
+                                      </p:cBhvr>
+                                      <p:to>
+                                        <p:strVal val="visible"/>
+                                      </p:to>
+                                    </p:set>
+                                    <p:animEffect transition="in" filter="fade">
+                                      <p:cBhvr>
+                                        <p:cTn id="18" dur="500"/>
+                                        <p:tgtEl>
+                                          <p:spTgt spid="6"/>
+                                        </p:tgtEl>
+                                      </p:cBhvr>
+                                    </p:animEffect>
+                                  </p:childTnLst>
+                                </p:cTn>
+                              </p:par>
+                            </p:childTnLst>
+                          </p:cTn>
+                        </p:par>
+                      </p:childTnLst>
+                    </p:cTn>
+                  </p:par>
+                  <p:par>
+                    <p:cTn id="19" fill="hold">
+                      <p:stCondLst>
+                        <p:cond delay="indefinite"/>
+                      </p:stCondLst>
+                      <p:childTnLst>
+                        <p:par>
+                          <p:cTn id="20" fill="hold">
+                            <p:stCondLst>
+                              <p:cond delay="0"/>
+                            </p:stCondLst>
+                            <p:childTnLst>
+                              <p:par>
+                                <p:cTn id="21" presetID="42" presetClass="entr" presetSubtype="0" fill="hold" nodeType="clickEffect">
+                                  <p:stCondLst>
+                                    <p:cond delay="0"/>
+                                  </p:stCondLst>
+                                  <p:childTnLst>
+                                    <p:set>
+                                      <p:cBhvr>
+                                        <p:cTn id="22" dur="1" fill="hold">
+                                          <p:stCondLst>
+                                            <p:cond delay="0"/>
+                                          </p:stCondLst>
+                                        </p:cTn>
+                                        <p:tgtEl>
+                                          <p:spTgt spid="3"/>
+                                        </p:tgtEl>
+                                        <p:attrNameLst>
+                                          <p:attrName>style.visibility</p:attrName>
+                                        </p:attrNameLst>
+                                      </p:cBhvr>
+                                      <p:to>
+                                        <p:strVal val="visible"/>
+                                      </p:to>
+                                    </p:set>
+                                    <p:animEffect transition="in" filter="fade">
+                                      <p:cBhvr>
+                                        <p:cTn id="23" dur="1000"/>
+                                        <p:tgtEl>
+                                          <p:spTgt spid="3"/>
+                                        </p:tgtEl>
+                                      </p:cBhvr>
+                                    </p:animEffect>
+                                    <p:anim calcmode="lin" valueType="num">
+                                      <p:cBhvr>
+                                        <p:cTn id="24" dur="1000" fill="hold"/>
+                                        <p:tgtEl>
+                                          <p:spTgt spid="3"/>
+                                        </p:tgtEl>
+                                        <p:attrNameLst>
+                                          <p:attrName>ppt_x</p:attrName>
+                                        </p:attrNameLst>
+                                      </p:cBhvr>
+                                      <p:tavLst>
+                                        <p:tav tm="0">
+                                          <p:val>
+                                            <p:strVal val="#ppt_x"/>
+                                          </p:val>
+                                        </p:tav>
+                                        <p:tav tm="100000">
+                                          <p:val>
+                                            <p:strVal val="#ppt_x"/>
+                                          </p:val>
+                                        </p:tav>
+                                      </p:tavLst>
+                                    </p:anim>
+                                    <p:anim calcmode="lin" valueType="num">
+                                      <p:cBhvr>
+                                        <p:cTn id="25" dur="1000" fill="hold"/>
+                                        <p:tgtEl>
+                                          <p:spTgt spid="3"/>
+                                        </p:tgtEl>
+                                        <p:attrNameLst>
+                                          <p:attrName>ppt_y</p:attrName>
+                                        </p:attrNameLst>
+                                      </p:cBhvr>
+                                      <p:tavLst>
+                                        <p:tav tm="0">
+                                          <p:val>
+                                            <p:strVal val="#ppt_y+.1"/>
+                                          </p:val>
+                                        </p:tav>
+                                        <p:tav tm="100000">
+                                          <p:val>
+                                            <p:strVal val="#ppt_y"/>
+                                          </p:val>
+                                        </p:tav>
+                                      </p:tavLst>
+                                    </p:anim>
+                                  </p:childTnLst>
+                                </p:cTn>
+                              </p:par>
+                            </p:childTnLst>
+                          </p:cTn>
+                        </p:par>
+                      </p:childTnLst>
+                    </p:cTn>
+                  </p:par>
+                </p:childTnLst>
+              </p:cTn>
+              <p:prevCondLst>
+                <p:cond evt="onPrev" delay="0">
+                  <p:tgtEl>
+                    <p:sldTgt/>
+                  </p:tgtEl>
+                </p:cond>
+              </p:prevCondLst>
+              <p:nextCondLst>
+                <p:cond evt="onNext" delay="0">
+                  <p:tgtEl>
+                    <p:sldTgt/>
+                  </p:tgtEl>
+                </p:cond>
+              </p:nextCondLst>
+            </p:seq>
+          </p:childTnLst>
+        </p:cTn>
+      </p:par>
+    </p:tnLst>
+    <p:bldLst>
+      <p:bldP spid="8" grpId="0"/>
+      <p:bldP spid="4" grpId="0"/>
+      <p:bldP spid="6" grpId="0"/>
+    </p:bldLst>
+  </p:timing>
 </p:sld>
 </file>
 
@@ -10434,6 +11652,329 @@
   <p:clrMapOvr>
     <a:masterClrMapping/>
   </p:clrMapOvr>
+  <p:timing>
+    <p:tnLst>
+      <p:par>
+        <p:cTn id="1" dur="indefinite" restart="never" nodeType="tmRoot">
+          <p:childTnLst>
+            <p:seq concurrent="1" nextAc="seek">
+              <p:cTn id="2" dur="indefinite" nodeType="mainSeq">
+                <p:childTnLst>
+                  <p:par>
+                    <p:cTn id="3" fill="hold">
+                      <p:stCondLst>
+                        <p:cond delay="indefinite"/>
+                      </p:stCondLst>
+                      <p:childTnLst>
+                        <p:par>
+                          <p:cTn id="4" fill="hold">
+                            <p:stCondLst>
+                              <p:cond delay="0"/>
+                            </p:stCondLst>
+                            <p:childTnLst>
+                              <p:par>
+                                <p:cTn id="5" presetID="10" presetClass="entr" presetSubtype="0" fill="hold" grpId="0" nodeType="clickEffect">
+                                  <p:stCondLst>
+                                    <p:cond delay="0"/>
+                                  </p:stCondLst>
+                                  <p:childTnLst>
+                                    <p:set>
+                                      <p:cBhvr>
+                                        <p:cTn id="6" dur="1" fill="hold">
+                                          <p:stCondLst>
+                                            <p:cond delay="0"/>
+                                          </p:stCondLst>
+                                        </p:cTn>
+                                        <p:tgtEl>
+                                          <p:spTgt spid="8"/>
+                                        </p:tgtEl>
+                                        <p:attrNameLst>
+                                          <p:attrName>style.visibility</p:attrName>
+                                        </p:attrNameLst>
+                                      </p:cBhvr>
+                                      <p:to>
+                                        <p:strVal val="visible"/>
+                                      </p:to>
+                                    </p:set>
+                                    <p:animEffect transition="in" filter="fade">
+                                      <p:cBhvr>
+                                        <p:cTn id="7" dur="500"/>
+                                        <p:tgtEl>
+                                          <p:spTgt spid="8"/>
+                                        </p:tgtEl>
+                                      </p:cBhvr>
+                                    </p:animEffect>
+                                  </p:childTnLst>
+                                </p:cTn>
+                              </p:par>
+                            </p:childTnLst>
+                          </p:cTn>
+                        </p:par>
+                      </p:childTnLst>
+                    </p:cTn>
+                  </p:par>
+                  <p:par>
+                    <p:cTn id="8" fill="hold">
+                      <p:stCondLst>
+                        <p:cond delay="indefinite"/>
+                      </p:stCondLst>
+                      <p:childTnLst>
+                        <p:par>
+                          <p:cTn id="9" fill="hold">
+                            <p:stCondLst>
+                              <p:cond delay="0"/>
+                            </p:stCondLst>
+                            <p:childTnLst>
+                              <p:par>
+                                <p:cTn id="10" presetID="2" presetClass="entr" presetSubtype="4" fill="hold" grpId="0" nodeType="clickEffect">
+                                  <p:stCondLst>
+                                    <p:cond delay="0"/>
+                                  </p:stCondLst>
+                                  <p:childTnLst>
+                                    <p:set>
+                                      <p:cBhvr>
+                                        <p:cTn id="11" dur="1" fill="hold">
+                                          <p:stCondLst>
+                                            <p:cond delay="0"/>
+                                          </p:stCondLst>
+                                        </p:cTn>
+                                        <p:tgtEl>
+                                          <p:spTgt spid="4"/>
+                                        </p:tgtEl>
+                                        <p:attrNameLst>
+                                          <p:attrName>style.visibility</p:attrName>
+                                        </p:attrNameLst>
+                                      </p:cBhvr>
+                                      <p:to>
+                                        <p:strVal val="visible"/>
+                                      </p:to>
+                                    </p:set>
+                                    <p:anim calcmode="lin" valueType="num">
+                                      <p:cBhvr additive="base">
+                                        <p:cTn id="12" dur="500" fill="hold"/>
+                                        <p:tgtEl>
+                                          <p:spTgt spid="4"/>
+                                        </p:tgtEl>
+                                        <p:attrNameLst>
+                                          <p:attrName>ppt_x</p:attrName>
+                                        </p:attrNameLst>
+                                      </p:cBhvr>
+                                      <p:tavLst>
+                                        <p:tav tm="0">
+                                          <p:val>
+                                            <p:strVal val="#ppt_x"/>
+                                          </p:val>
+                                        </p:tav>
+                                        <p:tav tm="100000">
+                                          <p:val>
+                                            <p:strVal val="#ppt_x"/>
+                                          </p:val>
+                                        </p:tav>
+                                      </p:tavLst>
+                                    </p:anim>
+                                    <p:anim calcmode="lin" valueType="num">
+                                      <p:cBhvr additive="base">
+                                        <p:cTn id="13" dur="500" fill="hold"/>
+                                        <p:tgtEl>
+                                          <p:spTgt spid="4"/>
+                                        </p:tgtEl>
+                                        <p:attrNameLst>
+                                          <p:attrName>ppt_y</p:attrName>
+                                        </p:attrNameLst>
+                                      </p:cBhvr>
+                                      <p:tavLst>
+                                        <p:tav tm="0">
+                                          <p:val>
+                                            <p:strVal val="1+#ppt_h/2"/>
+                                          </p:val>
+                                        </p:tav>
+                                        <p:tav tm="100000">
+                                          <p:val>
+                                            <p:strVal val="#ppt_y"/>
+                                          </p:val>
+                                        </p:tav>
+                                      </p:tavLst>
+                                    </p:anim>
+                                  </p:childTnLst>
+                                </p:cTn>
+                              </p:par>
+                            </p:childTnLst>
+                          </p:cTn>
+                        </p:par>
+                      </p:childTnLst>
+                    </p:cTn>
+                  </p:par>
+                  <p:par>
+                    <p:cTn id="14" fill="hold">
+                      <p:stCondLst>
+                        <p:cond delay="indefinite"/>
+                      </p:stCondLst>
+                      <p:childTnLst>
+                        <p:par>
+                          <p:cTn id="15" fill="hold">
+                            <p:stCondLst>
+                              <p:cond delay="0"/>
+                            </p:stCondLst>
+                            <p:childTnLst>
+                              <p:par>
+                                <p:cTn id="16" presetID="10" presetClass="entr" presetSubtype="0" fill="hold" grpId="0" nodeType="clickEffect">
+                                  <p:stCondLst>
+                                    <p:cond delay="0"/>
+                                  </p:stCondLst>
+                                  <p:childTnLst>
+                                    <p:set>
+                                      <p:cBhvr>
+                                        <p:cTn id="17" dur="1" fill="hold">
+                                          <p:stCondLst>
+                                            <p:cond delay="0"/>
+                                          </p:stCondLst>
+                                        </p:cTn>
+                                        <p:tgtEl>
+                                          <p:spTgt spid="6"/>
+                                        </p:tgtEl>
+                                        <p:attrNameLst>
+                                          <p:attrName>style.visibility</p:attrName>
+                                        </p:attrNameLst>
+                                      </p:cBhvr>
+                                      <p:to>
+                                        <p:strVal val="visible"/>
+                                      </p:to>
+                                    </p:set>
+                                    <p:animEffect transition="in" filter="fade">
+                                      <p:cBhvr>
+                                        <p:cTn id="18" dur="500"/>
+                                        <p:tgtEl>
+                                          <p:spTgt spid="6"/>
+                                        </p:tgtEl>
+                                      </p:cBhvr>
+                                    </p:animEffect>
+                                  </p:childTnLst>
+                                </p:cTn>
+                              </p:par>
+                            </p:childTnLst>
+                          </p:cTn>
+                        </p:par>
+                      </p:childTnLst>
+                    </p:cTn>
+                  </p:par>
+                  <p:par>
+                    <p:cTn id="19" fill="hold">
+                      <p:stCondLst>
+                        <p:cond delay="indefinite"/>
+                      </p:stCondLst>
+                      <p:childTnLst>
+                        <p:par>
+                          <p:cTn id="20" fill="hold">
+                            <p:stCondLst>
+                              <p:cond delay="0"/>
+                            </p:stCondLst>
+                            <p:childTnLst>
+                              <p:par>
+                                <p:cTn id="21" presetID="2" presetClass="entr" presetSubtype="4" fill="hold" nodeType="clickEffect">
+                                  <p:stCondLst>
+                                    <p:cond delay="0"/>
+                                  </p:stCondLst>
+                                  <p:childTnLst>
+                                    <p:set>
+                                      <p:cBhvr>
+                                        <p:cTn id="22" dur="1" fill="hold">
+                                          <p:stCondLst>
+                                            <p:cond delay="0"/>
+                                          </p:stCondLst>
+                                        </p:cTn>
+                                        <p:tgtEl>
+                                          <p:spTgt spid="2"/>
+                                        </p:tgtEl>
+                                        <p:attrNameLst>
+                                          <p:attrName>style.visibility</p:attrName>
+                                        </p:attrNameLst>
+                                      </p:cBhvr>
+                                      <p:to>
+                                        <p:strVal val="visible"/>
+                                      </p:to>
+                                    </p:set>
+                                    <p:anim calcmode="lin" valueType="num">
+                                      <p:cBhvr additive="base">
+                                        <p:cTn id="23" dur="500" fill="hold"/>
+                                        <p:tgtEl>
+                                          <p:spTgt spid="2"/>
+                                        </p:tgtEl>
+                                        <p:attrNameLst>
+                                          <p:attrName>ppt_x</p:attrName>
+                                        </p:attrNameLst>
+                                      </p:cBhvr>
+                                      <p:tavLst>
+                                        <p:tav tm="0">
+                                          <p:val>
+                                            <p:strVal val="#ppt_x"/>
+                                          </p:val>
+                                        </p:tav>
+                                        <p:tav tm="100000">
+                                          <p:val>
+                                            <p:strVal val="#ppt_x"/>
+                                          </p:val>
+                                        </p:tav>
+                                      </p:tavLst>
+                                    </p:anim>
+                                    <p:anim calcmode="lin" valueType="num">
+                                      <p:cBhvr additive="base">
+                                        <p:cTn id="24" dur="500" fill="hold"/>
+                                        <p:tgtEl>
+                                          <p:spTgt spid="2"/>
+                                        </p:tgtEl>
+                                        <p:attrNameLst>
+                                          <p:attrName>ppt_y</p:attrName>
+                                        </p:attrNameLst>
+                                      </p:cBhvr>
+                                      <p:tavLst>
+                                        <p:tav tm="0">
+                                          <p:val>
+                                            <p:strVal val="1+#ppt_h/2"/>
+                                          </p:val>
+                                        </p:tav>
+                                        <p:tav tm="100000">
+                                          <p:val>
+                                            <p:strVal val="#ppt_y"/>
+                                          </p:val>
+                                        </p:tav>
+                                      </p:tavLst>
+                                    </p:anim>
+                                  </p:childTnLst>
+                                </p:cTn>
+                              </p:par>
+                            </p:childTnLst>
+                          </p:cTn>
+                        </p:par>
+                      </p:childTnLst>
+                    </p:cTn>
+                  </p:par>
+                </p:childTnLst>
+              </p:cTn>
+              <p:prevCondLst>
+                <p:cond evt="onPrev" delay="0">
+                  <p:tgtEl>
+                    <p:sldTgt/>
+                  </p:tgtEl>
+                </p:cond>
+              </p:prevCondLst>
+              <p:nextCondLst>
+                <p:cond evt="onNext" delay="0">
+                  <p:tgtEl>
+                    <p:sldTgt/>
+                  </p:tgtEl>
+                </p:cond>
+              </p:nextCondLst>
+            </p:seq>
+          </p:childTnLst>
+        </p:cTn>
+      </p:par>
+    </p:tnLst>
+    <p:bldLst>
+      <p:bldP spid="8" grpId="0"/>
+      <p:bldP spid="4" grpId="0"/>
+      <p:bldP spid="6" grpId="0"/>
+    </p:bldLst>
+  </p:timing>
 </p:sld>
 </file>
 
@@ -10653,6 +12194,337 @@
   <p:clrMapOvr>
     <a:masterClrMapping/>
   </p:clrMapOvr>
+  <p:timing>
+    <p:tnLst>
+      <p:par>
+        <p:cTn id="1" dur="indefinite" restart="never" nodeType="tmRoot">
+          <p:childTnLst>
+            <p:seq concurrent="1" nextAc="seek">
+              <p:cTn id="2" dur="indefinite" nodeType="mainSeq">
+                <p:childTnLst>
+                  <p:par>
+                    <p:cTn id="3" fill="hold">
+                      <p:stCondLst>
+                        <p:cond delay="indefinite"/>
+                      </p:stCondLst>
+                      <p:childTnLst>
+                        <p:par>
+                          <p:cTn id="4" fill="hold">
+                            <p:stCondLst>
+                              <p:cond delay="0"/>
+                            </p:stCondLst>
+                            <p:childTnLst>
+                              <p:par>
+                                <p:cTn id="5" presetID="10" presetClass="entr" presetSubtype="0" fill="hold" grpId="0" nodeType="clickEffect">
+                                  <p:stCondLst>
+                                    <p:cond delay="0"/>
+                                  </p:stCondLst>
+                                  <p:childTnLst>
+                                    <p:set>
+                                      <p:cBhvr>
+                                        <p:cTn id="6" dur="1" fill="hold">
+                                          <p:stCondLst>
+                                            <p:cond delay="0"/>
+                                          </p:stCondLst>
+                                        </p:cTn>
+                                        <p:tgtEl>
+                                          <p:spTgt spid="8"/>
+                                        </p:tgtEl>
+                                        <p:attrNameLst>
+                                          <p:attrName>style.visibility</p:attrName>
+                                        </p:attrNameLst>
+                                      </p:cBhvr>
+                                      <p:to>
+                                        <p:strVal val="visible"/>
+                                      </p:to>
+                                    </p:set>
+                                    <p:animEffect transition="in" filter="fade">
+                                      <p:cBhvr>
+                                        <p:cTn id="7" dur="500"/>
+                                        <p:tgtEl>
+                                          <p:spTgt spid="8"/>
+                                        </p:tgtEl>
+                                      </p:cBhvr>
+                                    </p:animEffect>
+                                  </p:childTnLst>
+                                </p:cTn>
+                              </p:par>
+                            </p:childTnLst>
+                          </p:cTn>
+                        </p:par>
+                      </p:childTnLst>
+                    </p:cTn>
+                  </p:par>
+                  <p:par>
+                    <p:cTn id="8" fill="hold">
+                      <p:stCondLst>
+                        <p:cond delay="indefinite"/>
+                      </p:stCondLst>
+                      <p:childTnLst>
+                        <p:par>
+                          <p:cTn id="9" fill="hold">
+                            <p:stCondLst>
+                              <p:cond delay="0"/>
+                            </p:stCondLst>
+                            <p:childTnLst>
+                              <p:par>
+                                <p:cTn id="10" presetID="2" presetClass="entr" presetSubtype="4" fill="hold" grpId="0" nodeType="clickEffect">
+                                  <p:stCondLst>
+                                    <p:cond delay="0"/>
+                                  </p:stCondLst>
+                                  <p:childTnLst>
+                                    <p:set>
+                                      <p:cBhvr>
+                                        <p:cTn id="11" dur="1" fill="hold">
+                                          <p:stCondLst>
+                                            <p:cond delay="0"/>
+                                          </p:stCondLst>
+                                        </p:cTn>
+                                        <p:tgtEl>
+                                          <p:spTgt spid="4"/>
+                                        </p:tgtEl>
+                                        <p:attrNameLst>
+                                          <p:attrName>style.visibility</p:attrName>
+                                        </p:attrNameLst>
+                                      </p:cBhvr>
+                                      <p:to>
+                                        <p:strVal val="visible"/>
+                                      </p:to>
+                                    </p:set>
+                                    <p:anim calcmode="lin" valueType="num">
+                                      <p:cBhvr additive="base">
+                                        <p:cTn id="12" dur="500" fill="hold"/>
+                                        <p:tgtEl>
+                                          <p:spTgt spid="4"/>
+                                        </p:tgtEl>
+                                        <p:attrNameLst>
+                                          <p:attrName>ppt_x</p:attrName>
+                                        </p:attrNameLst>
+                                      </p:cBhvr>
+                                      <p:tavLst>
+                                        <p:tav tm="0">
+                                          <p:val>
+                                            <p:strVal val="#ppt_x"/>
+                                          </p:val>
+                                        </p:tav>
+                                        <p:tav tm="100000">
+                                          <p:val>
+                                            <p:strVal val="#ppt_x"/>
+                                          </p:val>
+                                        </p:tav>
+                                      </p:tavLst>
+                                    </p:anim>
+                                    <p:anim calcmode="lin" valueType="num">
+                                      <p:cBhvr additive="base">
+                                        <p:cTn id="13" dur="500" fill="hold"/>
+                                        <p:tgtEl>
+                                          <p:spTgt spid="4"/>
+                                        </p:tgtEl>
+                                        <p:attrNameLst>
+                                          <p:attrName>ppt_y</p:attrName>
+                                        </p:attrNameLst>
+                                      </p:cBhvr>
+                                      <p:tavLst>
+                                        <p:tav tm="0">
+                                          <p:val>
+                                            <p:strVal val="1+#ppt_h/2"/>
+                                          </p:val>
+                                        </p:tav>
+                                        <p:tav tm="100000">
+                                          <p:val>
+                                            <p:strVal val="#ppt_y"/>
+                                          </p:val>
+                                        </p:tav>
+                                      </p:tavLst>
+                                    </p:anim>
+                                  </p:childTnLst>
+                                </p:cTn>
+                              </p:par>
+                            </p:childTnLst>
+                          </p:cTn>
+                        </p:par>
+                      </p:childTnLst>
+                    </p:cTn>
+                  </p:par>
+                  <p:par>
+                    <p:cTn id="14" fill="hold">
+                      <p:stCondLst>
+                        <p:cond delay="indefinite"/>
+                      </p:stCondLst>
+                      <p:childTnLst>
+                        <p:par>
+                          <p:cTn id="15" fill="hold">
+                            <p:stCondLst>
+                              <p:cond delay="0"/>
+                            </p:stCondLst>
+                            <p:childTnLst>
+                              <p:par>
+                                <p:cTn id="16" presetID="10" presetClass="entr" presetSubtype="0" fill="hold" grpId="0" nodeType="clickEffect">
+                                  <p:stCondLst>
+                                    <p:cond delay="0"/>
+                                  </p:stCondLst>
+                                  <p:childTnLst>
+                                    <p:set>
+                                      <p:cBhvr>
+                                        <p:cTn id="17" dur="1" fill="hold">
+                                          <p:stCondLst>
+                                            <p:cond delay="0"/>
+                                          </p:stCondLst>
+                                        </p:cTn>
+                                        <p:tgtEl>
+                                          <p:spTgt spid="6"/>
+                                        </p:tgtEl>
+                                        <p:attrNameLst>
+                                          <p:attrName>style.visibility</p:attrName>
+                                        </p:attrNameLst>
+                                      </p:cBhvr>
+                                      <p:to>
+                                        <p:strVal val="visible"/>
+                                      </p:to>
+                                    </p:set>
+                                    <p:animEffect transition="in" filter="fade">
+                                      <p:cBhvr>
+                                        <p:cTn id="18" dur="500"/>
+                                        <p:tgtEl>
+                                          <p:spTgt spid="6"/>
+                                        </p:tgtEl>
+                                      </p:cBhvr>
+                                    </p:animEffect>
+                                  </p:childTnLst>
+                                </p:cTn>
+                              </p:par>
+                            </p:childTnLst>
+                          </p:cTn>
+                        </p:par>
+                      </p:childTnLst>
+                    </p:cTn>
+                  </p:par>
+                  <p:par>
+                    <p:cTn id="19" fill="hold">
+                      <p:stCondLst>
+                        <p:cond delay="indefinite"/>
+                      </p:stCondLst>
+                      <p:childTnLst>
+                        <p:par>
+                          <p:cTn id="20" fill="hold">
+                            <p:stCondLst>
+                              <p:cond delay="0"/>
+                            </p:stCondLst>
+                            <p:childTnLst>
+                              <p:par>
+                                <p:cTn id="21" presetID="42" presetClass="entr" presetSubtype="0" fill="hold" nodeType="clickEffect">
+                                  <p:stCondLst>
+                                    <p:cond delay="0"/>
+                                  </p:stCondLst>
+                                  <p:childTnLst>
+                                    <p:set>
+                                      <p:cBhvr>
+                                        <p:cTn id="22" dur="1" fill="hold">
+                                          <p:stCondLst>
+                                            <p:cond delay="0"/>
+                                          </p:stCondLst>
+                                        </p:cTn>
+                                        <p:tgtEl>
+                                          <p:spTgt spid="3"/>
+                                        </p:tgtEl>
+                                        <p:attrNameLst>
+                                          <p:attrName>style.visibility</p:attrName>
+                                        </p:attrNameLst>
+                                      </p:cBhvr>
+                                      <p:to>
+                                        <p:strVal val="visible"/>
+                                      </p:to>
+                                    </p:set>
+                                    <p:animEffect transition="in" filter="fade">
+                                      <p:cBhvr>
+                                        <p:cTn id="23" dur="1000"/>
+                                        <p:tgtEl>
+                                          <p:spTgt spid="3"/>
+                                        </p:tgtEl>
+                                      </p:cBhvr>
+                                    </p:animEffect>
+                                    <p:anim calcmode="lin" valueType="num">
+                                      <p:cBhvr>
+                                        <p:cTn id="24" dur="1000" fill="hold"/>
+                                        <p:tgtEl>
+                                          <p:spTgt spid="3"/>
+                                        </p:tgtEl>
+                                        <p:attrNameLst>
+                                          <p:attrName>ppt_x</p:attrName>
+                                        </p:attrNameLst>
+                                      </p:cBhvr>
+                                      <p:tavLst>
+                                        <p:tav tm="0">
+                                          <p:val>
+                                            <p:strVal val="#ppt_x"/>
+                                          </p:val>
+                                        </p:tav>
+                                        <p:tav tm="100000">
+                                          <p:val>
+                                            <p:strVal val="#ppt_x"/>
+                                          </p:val>
+                                        </p:tav>
+                                      </p:tavLst>
+                                    </p:anim>
+                                    <p:anim calcmode="lin" valueType="num">
+                                      <p:cBhvr>
+                                        <p:cTn id="25" dur="1000" fill="hold"/>
+                                        <p:tgtEl>
+                                          <p:spTgt spid="3"/>
+                                        </p:tgtEl>
+                                        <p:attrNameLst>
+                                          <p:attrName>ppt_y</p:attrName>
+                                        </p:attrNameLst>
+                                      </p:cBhvr>
+                                      <p:tavLst>
+                                        <p:tav tm="0">
+                                          <p:val>
+                                            <p:strVal val="#ppt_y+.1"/>
+                                          </p:val>
+                                        </p:tav>
+                                        <p:tav tm="100000">
+                                          <p:val>
+                                            <p:strVal val="#ppt_y"/>
+                                          </p:val>
+                                        </p:tav>
+                                      </p:tavLst>
+                                    </p:anim>
+                                  </p:childTnLst>
+                                </p:cTn>
+                              </p:par>
+                            </p:childTnLst>
+                          </p:cTn>
+                        </p:par>
+                      </p:childTnLst>
+                    </p:cTn>
+                  </p:par>
+                </p:childTnLst>
+              </p:cTn>
+              <p:prevCondLst>
+                <p:cond evt="onPrev" delay="0">
+                  <p:tgtEl>
+                    <p:sldTgt/>
+                  </p:tgtEl>
+                </p:cond>
+              </p:prevCondLst>
+              <p:nextCondLst>
+                <p:cond evt="onNext" delay="0">
+                  <p:tgtEl>
+                    <p:sldTgt/>
+                  </p:tgtEl>
+                </p:cond>
+              </p:nextCondLst>
+            </p:seq>
+          </p:childTnLst>
+        </p:cTn>
+      </p:par>
+    </p:tnLst>
+    <p:bldLst>
+      <p:bldP spid="8" grpId="0"/>
+      <p:bldP spid="4" grpId="0"/>
+      <p:bldP spid="6" grpId="0"/>
+    </p:bldLst>
+  </p:timing>
 </p:sld>
 </file>
 
@@ -12098,6 +13970,699 @@
   <p:clrMapOvr>
     <a:masterClrMapping/>
   </p:clrMapOvr>
+  <p:timing>
+    <p:tnLst>
+      <p:par>
+        <p:cTn id="1" dur="indefinite" restart="never" nodeType="tmRoot">
+          <p:childTnLst>
+            <p:seq concurrent="1" nextAc="seek">
+              <p:cTn id="2" dur="indefinite" nodeType="mainSeq">
+                <p:childTnLst>
+                  <p:par>
+                    <p:cTn id="3" fill="hold">
+                      <p:stCondLst>
+                        <p:cond delay="indefinite"/>
+                      </p:stCondLst>
+                      <p:childTnLst>
+                        <p:par>
+                          <p:cTn id="4" fill="hold">
+                            <p:stCondLst>
+                              <p:cond delay="0"/>
+                            </p:stCondLst>
+                            <p:childTnLst>
+                              <p:par>
+                                <p:cTn id="5" presetID="10" presetClass="entr" presetSubtype="0" fill="hold" grpId="0" nodeType="clickEffect">
+                                  <p:stCondLst>
+                                    <p:cond delay="0"/>
+                                  </p:stCondLst>
+                                  <p:childTnLst>
+                                    <p:set>
+                                      <p:cBhvr>
+                                        <p:cTn id="6" dur="1" fill="hold">
+                                          <p:stCondLst>
+                                            <p:cond delay="0"/>
+                                          </p:stCondLst>
+                                        </p:cTn>
+                                        <p:tgtEl>
+                                          <p:spTgt spid="6"/>
+                                        </p:tgtEl>
+                                        <p:attrNameLst>
+                                          <p:attrName>style.visibility</p:attrName>
+                                        </p:attrNameLst>
+                                      </p:cBhvr>
+                                      <p:to>
+                                        <p:strVal val="visible"/>
+                                      </p:to>
+                                    </p:set>
+                                    <p:animEffect transition="in" filter="fade">
+                                      <p:cBhvr>
+                                        <p:cTn id="7" dur="500"/>
+                                        <p:tgtEl>
+                                          <p:spTgt spid="6"/>
+                                        </p:tgtEl>
+                                      </p:cBhvr>
+                                    </p:animEffect>
+                                  </p:childTnLst>
+                                </p:cTn>
+                              </p:par>
+                            </p:childTnLst>
+                          </p:cTn>
+                        </p:par>
+                      </p:childTnLst>
+                    </p:cTn>
+                  </p:par>
+                  <p:par>
+                    <p:cTn id="8" fill="hold">
+                      <p:stCondLst>
+                        <p:cond delay="indefinite"/>
+                      </p:stCondLst>
+                      <p:childTnLst>
+                        <p:par>
+                          <p:cTn id="9" fill="hold">
+                            <p:stCondLst>
+                              <p:cond delay="0"/>
+                            </p:stCondLst>
+                            <p:childTnLst>
+                              <p:par>
+                                <p:cTn id="10" presetID="2" presetClass="entr" presetSubtype="4" fill="hold" grpId="0" nodeType="clickEffect">
+                                  <p:stCondLst>
+                                    <p:cond delay="0"/>
+                                  </p:stCondLst>
+                                  <p:childTnLst>
+                                    <p:set>
+                                      <p:cBhvr>
+                                        <p:cTn id="11" dur="1" fill="hold">
+                                          <p:stCondLst>
+                                            <p:cond delay="0"/>
+                                          </p:stCondLst>
+                                        </p:cTn>
+                                        <p:tgtEl>
+                                          <p:spTgt spid="8"/>
+                                        </p:tgtEl>
+                                        <p:attrNameLst>
+                                          <p:attrName>style.visibility</p:attrName>
+                                        </p:attrNameLst>
+                                      </p:cBhvr>
+                                      <p:to>
+                                        <p:strVal val="visible"/>
+                                      </p:to>
+                                    </p:set>
+                                    <p:anim calcmode="lin" valueType="num">
+                                      <p:cBhvr additive="base">
+                                        <p:cTn id="12" dur="500" fill="hold"/>
+                                        <p:tgtEl>
+                                          <p:spTgt spid="8"/>
+                                        </p:tgtEl>
+                                        <p:attrNameLst>
+                                          <p:attrName>ppt_x</p:attrName>
+                                        </p:attrNameLst>
+                                      </p:cBhvr>
+                                      <p:tavLst>
+                                        <p:tav tm="0">
+                                          <p:val>
+                                            <p:strVal val="#ppt_x"/>
+                                          </p:val>
+                                        </p:tav>
+                                        <p:tav tm="100000">
+                                          <p:val>
+                                            <p:strVal val="#ppt_x"/>
+                                          </p:val>
+                                        </p:tav>
+                                      </p:tavLst>
+                                    </p:anim>
+                                    <p:anim calcmode="lin" valueType="num">
+                                      <p:cBhvr additive="base">
+                                        <p:cTn id="13" dur="500" fill="hold"/>
+                                        <p:tgtEl>
+                                          <p:spTgt spid="8"/>
+                                        </p:tgtEl>
+                                        <p:attrNameLst>
+                                          <p:attrName>ppt_y</p:attrName>
+                                        </p:attrNameLst>
+                                      </p:cBhvr>
+                                      <p:tavLst>
+                                        <p:tav tm="0">
+                                          <p:val>
+                                            <p:strVal val="1+#ppt_h/2"/>
+                                          </p:val>
+                                        </p:tav>
+                                        <p:tav tm="100000">
+                                          <p:val>
+                                            <p:strVal val="#ppt_y"/>
+                                          </p:val>
+                                        </p:tav>
+                                      </p:tavLst>
+                                    </p:anim>
+                                  </p:childTnLst>
+                                </p:cTn>
+                              </p:par>
+                            </p:childTnLst>
+                          </p:cTn>
+                        </p:par>
+                      </p:childTnLst>
+                    </p:cTn>
+                  </p:par>
+                  <p:par>
+                    <p:cTn id="14" fill="hold">
+                      <p:stCondLst>
+                        <p:cond delay="indefinite"/>
+                      </p:stCondLst>
+                      <p:childTnLst>
+                        <p:par>
+                          <p:cTn id="15" fill="hold">
+                            <p:stCondLst>
+                              <p:cond delay="0"/>
+                            </p:stCondLst>
+                            <p:childTnLst>
+                              <p:par>
+                                <p:cTn id="16" presetID="10" presetClass="entr" presetSubtype="0" fill="hold" grpId="0" nodeType="clickEffect">
+                                  <p:stCondLst>
+                                    <p:cond delay="0"/>
+                                  </p:stCondLst>
+                                  <p:childTnLst>
+                                    <p:set>
+                                      <p:cBhvr>
+                                        <p:cTn id="17" dur="1" fill="hold">
+                                          <p:stCondLst>
+                                            <p:cond delay="0"/>
+                                          </p:stCondLst>
+                                        </p:cTn>
+                                        <p:tgtEl>
+                                          <p:spTgt spid="9"/>
+                                        </p:tgtEl>
+                                        <p:attrNameLst>
+                                          <p:attrName>style.visibility</p:attrName>
+                                        </p:attrNameLst>
+                                      </p:cBhvr>
+                                      <p:to>
+                                        <p:strVal val="visible"/>
+                                      </p:to>
+                                    </p:set>
+                                    <p:animEffect transition="in" filter="fade">
+                                      <p:cBhvr>
+                                        <p:cTn id="18" dur="500"/>
+                                        <p:tgtEl>
+                                          <p:spTgt spid="9"/>
+                                        </p:tgtEl>
+                                      </p:cBhvr>
+                                    </p:animEffect>
+                                  </p:childTnLst>
+                                </p:cTn>
+                              </p:par>
+                            </p:childTnLst>
+                          </p:cTn>
+                        </p:par>
+                      </p:childTnLst>
+                    </p:cTn>
+                  </p:par>
+                  <p:par>
+                    <p:cTn id="19" fill="hold">
+                      <p:stCondLst>
+                        <p:cond delay="indefinite"/>
+                      </p:stCondLst>
+                      <p:childTnLst>
+                        <p:par>
+                          <p:cTn id="20" fill="hold">
+                            <p:stCondLst>
+                              <p:cond delay="0"/>
+                            </p:stCondLst>
+                            <p:childTnLst>
+                              <p:par>
+                                <p:cTn id="21" presetID="42" presetClass="entr" presetSubtype="0" fill="hold" grpId="0" nodeType="clickEffect">
+                                  <p:stCondLst>
+                                    <p:cond delay="0"/>
+                                  </p:stCondLst>
+                                  <p:childTnLst>
+                                    <p:set>
+                                      <p:cBhvr>
+                                        <p:cTn id="22" dur="1" fill="hold">
+                                          <p:stCondLst>
+                                            <p:cond delay="0"/>
+                                          </p:stCondLst>
+                                        </p:cTn>
+                                        <p:tgtEl>
+                                          <p:spTgt spid="3">
+                                            <p:txEl>
+                                              <p:pRg st="0" end="0"/>
+                                            </p:txEl>
+                                          </p:spTgt>
+                                        </p:tgtEl>
+                                        <p:attrNameLst>
+                                          <p:attrName>style.visibility</p:attrName>
+                                        </p:attrNameLst>
+                                      </p:cBhvr>
+                                      <p:to>
+                                        <p:strVal val="visible"/>
+                                      </p:to>
+                                    </p:set>
+                                    <p:animEffect transition="in" filter="fade">
+                                      <p:cBhvr>
+                                        <p:cTn id="23" dur="1000"/>
+                                        <p:tgtEl>
+                                          <p:spTgt spid="3">
+                                            <p:txEl>
+                                              <p:pRg st="0" end="0"/>
+                                            </p:txEl>
+                                          </p:spTgt>
+                                        </p:tgtEl>
+                                      </p:cBhvr>
+                                    </p:animEffect>
+                                    <p:anim calcmode="lin" valueType="num">
+                                      <p:cBhvr>
+                                        <p:cTn id="24" dur="1000" fill="hold"/>
+                                        <p:tgtEl>
+                                          <p:spTgt spid="3">
+                                            <p:txEl>
+                                              <p:pRg st="0" end="0"/>
+                                            </p:txEl>
+                                          </p:spTgt>
+                                        </p:tgtEl>
+                                        <p:attrNameLst>
+                                          <p:attrName>ppt_x</p:attrName>
+                                        </p:attrNameLst>
+                                      </p:cBhvr>
+                                      <p:tavLst>
+                                        <p:tav tm="0">
+                                          <p:val>
+                                            <p:strVal val="#ppt_x"/>
+                                          </p:val>
+                                        </p:tav>
+                                        <p:tav tm="100000">
+                                          <p:val>
+                                            <p:strVal val="#ppt_x"/>
+                                          </p:val>
+                                        </p:tav>
+                                      </p:tavLst>
+                                    </p:anim>
+                                    <p:anim calcmode="lin" valueType="num">
+                                      <p:cBhvr>
+                                        <p:cTn id="25" dur="1000" fill="hold"/>
+                                        <p:tgtEl>
+                                          <p:spTgt spid="3">
+                                            <p:txEl>
+                                              <p:pRg st="0" end="0"/>
+                                            </p:txEl>
+                                          </p:spTgt>
+                                        </p:tgtEl>
+                                        <p:attrNameLst>
+                                          <p:attrName>ppt_y</p:attrName>
+                                        </p:attrNameLst>
+                                      </p:cBhvr>
+                                      <p:tavLst>
+                                        <p:tav tm="0">
+                                          <p:val>
+                                            <p:strVal val="#ppt_y+.1"/>
+                                          </p:val>
+                                        </p:tav>
+                                        <p:tav tm="100000">
+                                          <p:val>
+                                            <p:strVal val="#ppt_y"/>
+                                          </p:val>
+                                        </p:tav>
+                                      </p:tavLst>
+                                    </p:anim>
+                                  </p:childTnLst>
+                                </p:cTn>
+                              </p:par>
+                            </p:childTnLst>
+                          </p:cTn>
+                        </p:par>
+                      </p:childTnLst>
+                    </p:cTn>
+                  </p:par>
+                  <p:par>
+                    <p:cTn id="26" fill="hold">
+                      <p:stCondLst>
+                        <p:cond delay="indefinite"/>
+                      </p:stCondLst>
+                      <p:childTnLst>
+                        <p:par>
+                          <p:cTn id="27" fill="hold">
+                            <p:stCondLst>
+                              <p:cond delay="0"/>
+                            </p:stCondLst>
+                            <p:childTnLst>
+                              <p:par>
+                                <p:cTn id="28" presetID="42" presetClass="entr" presetSubtype="0" fill="hold" grpId="0" nodeType="clickEffect">
+                                  <p:stCondLst>
+                                    <p:cond delay="0"/>
+                                  </p:stCondLst>
+                                  <p:childTnLst>
+                                    <p:set>
+                                      <p:cBhvr>
+                                        <p:cTn id="29" dur="1" fill="hold">
+                                          <p:stCondLst>
+                                            <p:cond delay="0"/>
+                                          </p:stCondLst>
+                                        </p:cTn>
+                                        <p:tgtEl>
+                                          <p:spTgt spid="3">
+                                            <p:txEl>
+                                              <p:pRg st="1" end="1"/>
+                                            </p:txEl>
+                                          </p:spTgt>
+                                        </p:tgtEl>
+                                        <p:attrNameLst>
+                                          <p:attrName>style.visibility</p:attrName>
+                                        </p:attrNameLst>
+                                      </p:cBhvr>
+                                      <p:to>
+                                        <p:strVal val="visible"/>
+                                      </p:to>
+                                    </p:set>
+                                    <p:animEffect transition="in" filter="fade">
+                                      <p:cBhvr>
+                                        <p:cTn id="30" dur="1000"/>
+                                        <p:tgtEl>
+                                          <p:spTgt spid="3">
+                                            <p:txEl>
+                                              <p:pRg st="1" end="1"/>
+                                            </p:txEl>
+                                          </p:spTgt>
+                                        </p:tgtEl>
+                                      </p:cBhvr>
+                                    </p:animEffect>
+                                    <p:anim calcmode="lin" valueType="num">
+                                      <p:cBhvr>
+                                        <p:cTn id="31" dur="1000" fill="hold"/>
+                                        <p:tgtEl>
+                                          <p:spTgt spid="3">
+                                            <p:txEl>
+                                              <p:pRg st="1" end="1"/>
+                                            </p:txEl>
+                                          </p:spTgt>
+                                        </p:tgtEl>
+                                        <p:attrNameLst>
+                                          <p:attrName>ppt_x</p:attrName>
+                                        </p:attrNameLst>
+                                      </p:cBhvr>
+                                      <p:tavLst>
+                                        <p:tav tm="0">
+                                          <p:val>
+                                            <p:strVal val="#ppt_x"/>
+                                          </p:val>
+                                        </p:tav>
+                                        <p:tav tm="100000">
+                                          <p:val>
+                                            <p:strVal val="#ppt_x"/>
+                                          </p:val>
+                                        </p:tav>
+                                      </p:tavLst>
+                                    </p:anim>
+                                    <p:anim calcmode="lin" valueType="num">
+                                      <p:cBhvr>
+                                        <p:cTn id="32" dur="1000" fill="hold"/>
+                                        <p:tgtEl>
+                                          <p:spTgt spid="3">
+                                            <p:txEl>
+                                              <p:pRg st="1" end="1"/>
+                                            </p:txEl>
+                                          </p:spTgt>
+                                        </p:tgtEl>
+                                        <p:attrNameLst>
+                                          <p:attrName>ppt_y</p:attrName>
+                                        </p:attrNameLst>
+                                      </p:cBhvr>
+                                      <p:tavLst>
+                                        <p:tav tm="0">
+                                          <p:val>
+                                            <p:strVal val="#ppt_y+.1"/>
+                                          </p:val>
+                                        </p:tav>
+                                        <p:tav tm="100000">
+                                          <p:val>
+                                            <p:strVal val="#ppt_y"/>
+                                          </p:val>
+                                        </p:tav>
+                                      </p:tavLst>
+                                    </p:anim>
+                                  </p:childTnLst>
+                                </p:cTn>
+                              </p:par>
+                            </p:childTnLst>
+                          </p:cTn>
+                        </p:par>
+                      </p:childTnLst>
+                    </p:cTn>
+                  </p:par>
+                  <p:par>
+                    <p:cTn id="33" fill="hold">
+                      <p:stCondLst>
+                        <p:cond delay="indefinite"/>
+                      </p:stCondLst>
+                      <p:childTnLst>
+                        <p:par>
+                          <p:cTn id="34" fill="hold">
+                            <p:stCondLst>
+                              <p:cond delay="0"/>
+                            </p:stCondLst>
+                            <p:childTnLst>
+                              <p:par>
+                                <p:cTn id="35" presetID="42" presetClass="entr" presetSubtype="0" fill="hold" grpId="0" nodeType="clickEffect">
+                                  <p:stCondLst>
+                                    <p:cond delay="0"/>
+                                  </p:stCondLst>
+                                  <p:childTnLst>
+                                    <p:set>
+                                      <p:cBhvr>
+                                        <p:cTn id="36" dur="1" fill="hold">
+                                          <p:stCondLst>
+                                            <p:cond delay="0"/>
+                                          </p:stCondLst>
+                                        </p:cTn>
+                                        <p:tgtEl>
+                                          <p:spTgt spid="3">
+                                            <p:txEl>
+                                              <p:pRg st="2" end="2"/>
+                                            </p:txEl>
+                                          </p:spTgt>
+                                        </p:tgtEl>
+                                        <p:attrNameLst>
+                                          <p:attrName>style.visibility</p:attrName>
+                                        </p:attrNameLst>
+                                      </p:cBhvr>
+                                      <p:to>
+                                        <p:strVal val="visible"/>
+                                      </p:to>
+                                    </p:set>
+                                    <p:animEffect transition="in" filter="fade">
+                                      <p:cBhvr>
+                                        <p:cTn id="37" dur="1000"/>
+                                        <p:tgtEl>
+                                          <p:spTgt spid="3">
+                                            <p:txEl>
+                                              <p:pRg st="2" end="2"/>
+                                            </p:txEl>
+                                          </p:spTgt>
+                                        </p:tgtEl>
+                                      </p:cBhvr>
+                                    </p:animEffect>
+                                    <p:anim calcmode="lin" valueType="num">
+                                      <p:cBhvr>
+                                        <p:cTn id="38" dur="1000" fill="hold"/>
+                                        <p:tgtEl>
+                                          <p:spTgt spid="3">
+                                            <p:txEl>
+                                              <p:pRg st="2" end="2"/>
+                                            </p:txEl>
+                                          </p:spTgt>
+                                        </p:tgtEl>
+                                        <p:attrNameLst>
+                                          <p:attrName>ppt_x</p:attrName>
+                                        </p:attrNameLst>
+                                      </p:cBhvr>
+                                      <p:tavLst>
+                                        <p:tav tm="0">
+                                          <p:val>
+                                            <p:strVal val="#ppt_x"/>
+                                          </p:val>
+                                        </p:tav>
+                                        <p:tav tm="100000">
+                                          <p:val>
+                                            <p:strVal val="#ppt_x"/>
+                                          </p:val>
+                                        </p:tav>
+                                      </p:tavLst>
+                                    </p:anim>
+                                    <p:anim calcmode="lin" valueType="num">
+                                      <p:cBhvr>
+                                        <p:cTn id="39" dur="1000" fill="hold"/>
+                                        <p:tgtEl>
+                                          <p:spTgt spid="3">
+                                            <p:txEl>
+                                              <p:pRg st="2" end="2"/>
+                                            </p:txEl>
+                                          </p:spTgt>
+                                        </p:tgtEl>
+                                        <p:attrNameLst>
+                                          <p:attrName>ppt_y</p:attrName>
+                                        </p:attrNameLst>
+                                      </p:cBhvr>
+                                      <p:tavLst>
+                                        <p:tav tm="0">
+                                          <p:val>
+                                            <p:strVal val="#ppt_y+.1"/>
+                                          </p:val>
+                                        </p:tav>
+                                        <p:tav tm="100000">
+                                          <p:val>
+                                            <p:strVal val="#ppt_y"/>
+                                          </p:val>
+                                        </p:tav>
+                                      </p:tavLst>
+                                    </p:anim>
+                                  </p:childTnLst>
+                                </p:cTn>
+                              </p:par>
+                            </p:childTnLst>
+                          </p:cTn>
+                        </p:par>
+                      </p:childTnLst>
+                    </p:cTn>
+                  </p:par>
+                  <p:par>
+                    <p:cTn id="40" fill="hold">
+                      <p:stCondLst>
+                        <p:cond delay="indefinite"/>
+                      </p:stCondLst>
+                      <p:childTnLst>
+                        <p:par>
+                          <p:cTn id="41" fill="hold">
+                            <p:stCondLst>
+                              <p:cond delay="0"/>
+                            </p:stCondLst>
+                            <p:childTnLst>
+                              <p:par>
+                                <p:cTn id="42" presetID="42" presetClass="entr" presetSubtype="0" fill="hold" grpId="0" nodeType="clickEffect">
+                                  <p:stCondLst>
+                                    <p:cond delay="0"/>
+                                  </p:stCondLst>
+                                  <p:childTnLst>
+                                    <p:set>
+                                      <p:cBhvr>
+                                        <p:cTn id="43" dur="1" fill="hold">
+                                          <p:stCondLst>
+                                            <p:cond delay="0"/>
+                                          </p:stCondLst>
+                                        </p:cTn>
+                                        <p:tgtEl>
+                                          <p:spTgt spid="3">
+                                            <p:txEl>
+                                              <p:pRg st="3" end="3"/>
+                                            </p:txEl>
+                                          </p:spTgt>
+                                        </p:tgtEl>
+                                        <p:attrNameLst>
+                                          <p:attrName>style.visibility</p:attrName>
+                                        </p:attrNameLst>
+                                      </p:cBhvr>
+                                      <p:to>
+                                        <p:strVal val="visible"/>
+                                      </p:to>
+                                    </p:set>
+                                    <p:animEffect transition="in" filter="fade">
+                                      <p:cBhvr>
+                                        <p:cTn id="44" dur="1000"/>
+                                        <p:tgtEl>
+                                          <p:spTgt spid="3">
+                                            <p:txEl>
+                                              <p:pRg st="3" end="3"/>
+                                            </p:txEl>
+                                          </p:spTgt>
+                                        </p:tgtEl>
+                                      </p:cBhvr>
+                                    </p:animEffect>
+                                    <p:anim calcmode="lin" valueType="num">
+                                      <p:cBhvr>
+                                        <p:cTn id="45" dur="1000" fill="hold"/>
+                                        <p:tgtEl>
+                                          <p:spTgt spid="3">
+                                            <p:txEl>
+                                              <p:pRg st="3" end="3"/>
+                                            </p:txEl>
+                                          </p:spTgt>
+                                        </p:tgtEl>
+                                        <p:attrNameLst>
+                                          <p:attrName>ppt_x</p:attrName>
+                                        </p:attrNameLst>
+                                      </p:cBhvr>
+                                      <p:tavLst>
+                                        <p:tav tm="0">
+                                          <p:val>
+                                            <p:strVal val="#ppt_x"/>
+                                          </p:val>
+                                        </p:tav>
+                                        <p:tav tm="100000">
+                                          <p:val>
+                                            <p:strVal val="#ppt_x"/>
+                                          </p:val>
+                                        </p:tav>
+                                      </p:tavLst>
+                                    </p:anim>
+                                    <p:anim calcmode="lin" valueType="num">
+                                      <p:cBhvr>
+                                        <p:cTn id="46" dur="1000" fill="hold"/>
+                                        <p:tgtEl>
+                                          <p:spTgt spid="3">
+                                            <p:txEl>
+                                              <p:pRg st="3" end="3"/>
+                                            </p:txEl>
+                                          </p:spTgt>
+                                        </p:tgtEl>
+                                        <p:attrNameLst>
+                                          <p:attrName>ppt_y</p:attrName>
+                                        </p:attrNameLst>
+                                      </p:cBhvr>
+                                      <p:tavLst>
+                                        <p:tav tm="0">
+                                          <p:val>
+                                            <p:strVal val="#ppt_y+.1"/>
+                                          </p:val>
+                                        </p:tav>
+                                        <p:tav tm="100000">
+                                          <p:val>
+                                            <p:strVal val="#ppt_y"/>
+                                          </p:val>
+                                        </p:tav>
+                                      </p:tavLst>
+                                    </p:anim>
+                                  </p:childTnLst>
+                                </p:cTn>
+                              </p:par>
+                            </p:childTnLst>
+                          </p:cTn>
+                        </p:par>
+                      </p:childTnLst>
+                    </p:cTn>
+                  </p:par>
+                </p:childTnLst>
+              </p:cTn>
+              <p:prevCondLst>
+                <p:cond evt="onPrev" delay="0">
+                  <p:tgtEl>
+                    <p:sldTgt/>
+                  </p:tgtEl>
+                </p:cond>
+              </p:prevCondLst>
+              <p:nextCondLst>
+                <p:cond evt="onNext" delay="0">
+                  <p:tgtEl>
+                    <p:sldTgt/>
+                  </p:tgtEl>
+                </p:cond>
+              </p:nextCondLst>
+            </p:seq>
+          </p:childTnLst>
+        </p:cTn>
+      </p:par>
+    </p:tnLst>
+    <p:bldLst>
+      <p:bldP spid="3" grpId="0" build="p"/>
+      <p:bldP spid="6" grpId="0"/>
+      <p:bldP spid="8" grpId="0"/>
+      <p:bldP spid="9" grpId="0"/>
+    </p:bldLst>
+  </p:timing>
 </p:sld>
 </file>
 
@@ -12171,7 +14736,7 @@
         </p:nvSpPr>
         <p:spPr>
           <a:xfrm>
-            <a:off x="940982" y="2828976"/>
+            <a:off x="951256" y="2828976"/>
             <a:ext cx="9601200" cy="2893310"/>
           </a:xfrm>
         </p:spPr>
@@ -12279,8 +14844,8 @@
         </p:nvSpPr>
         <p:spPr>
           <a:xfrm>
-            <a:off x="940982" y="2156922"/>
-            <a:ext cx="5317314" cy="646330"/>
+            <a:off x="940982" y="2166545"/>
+            <a:ext cx="5317314" cy="506412"/>
           </a:xfrm>
           <a:prstGeom prst="rect">
             <a:avLst/>
@@ -13114,6 +15679,699 @@
   <p:clrMapOvr>
     <a:masterClrMapping/>
   </p:clrMapOvr>
+  <p:timing>
+    <p:tnLst>
+      <p:par>
+        <p:cTn id="1" dur="indefinite" restart="never" nodeType="tmRoot">
+          <p:childTnLst>
+            <p:seq concurrent="1" nextAc="seek">
+              <p:cTn id="2" dur="indefinite" nodeType="mainSeq">
+                <p:childTnLst>
+                  <p:par>
+                    <p:cTn id="3" fill="hold">
+                      <p:stCondLst>
+                        <p:cond delay="indefinite"/>
+                      </p:stCondLst>
+                      <p:childTnLst>
+                        <p:par>
+                          <p:cTn id="4" fill="hold">
+                            <p:stCondLst>
+                              <p:cond delay="0"/>
+                            </p:stCondLst>
+                            <p:childTnLst>
+                              <p:par>
+                                <p:cTn id="5" presetID="10" presetClass="entr" presetSubtype="0" fill="hold" grpId="0" nodeType="clickEffect">
+                                  <p:stCondLst>
+                                    <p:cond delay="0"/>
+                                  </p:stCondLst>
+                                  <p:childTnLst>
+                                    <p:set>
+                                      <p:cBhvr>
+                                        <p:cTn id="6" dur="1" fill="hold">
+                                          <p:stCondLst>
+                                            <p:cond delay="0"/>
+                                          </p:stCondLst>
+                                        </p:cTn>
+                                        <p:tgtEl>
+                                          <p:spTgt spid="2"/>
+                                        </p:tgtEl>
+                                        <p:attrNameLst>
+                                          <p:attrName>style.visibility</p:attrName>
+                                        </p:attrNameLst>
+                                      </p:cBhvr>
+                                      <p:to>
+                                        <p:strVal val="visible"/>
+                                      </p:to>
+                                    </p:set>
+                                    <p:animEffect transition="in" filter="fade">
+                                      <p:cBhvr>
+                                        <p:cTn id="7" dur="500"/>
+                                        <p:tgtEl>
+                                          <p:spTgt spid="2"/>
+                                        </p:tgtEl>
+                                      </p:cBhvr>
+                                    </p:animEffect>
+                                  </p:childTnLst>
+                                </p:cTn>
+                              </p:par>
+                            </p:childTnLst>
+                          </p:cTn>
+                        </p:par>
+                      </p:childTnLst>
+                    </p:cTn>
+                  </p:par>
+                  <p:par>
+                    <p:cTn id="8" fill="hold">
+                      <p:stCondLst>
+                        <p:cond delay="indefinite"/>
+                      </p:stCondLst>
+                      <p:childTnLst>
+                        <p:par>
+                          <p:cTn id="9" fill="hold">
+                            <p:stCondLst>
+                              <p:cond delay="0"/>
+                            </p:stCondLst>
+                            <p:childTnLst>
+                              <p:par>
+                                <p:cTn id="10" presetID="2" presetClass="entr" presetSubtype="4" fill="hold" grpId="0" nodeType="clickEffect">
+                                  <p:stCondLst>
+                                    <p:cond delay="0"/>
+                                  </p:stCondLst>
+                                  <p:childTnLst>
+                                    <p:set>
+                                      <p:cBhvr>
+                                        <p:cTn id="11" dur="1" fill="hold">
+                                          <p:stCondLst>
+                                            <p:cond delay="0"/>
+                                          </p:stCondLst>
+                                        </p:cTn>
+                                        <p:tgtEl>
+                                          <p:spTgt spid="5"/>
+                                        </p:tgtEl>
+                                        <p:attrNameLst>
+                                          <p:attrName>style.visibility</p:attrName>
+                                        </p:attrNameLst>
+                                      </p:cBhvr>
+                                      <p:to>
+                                        <p:strVal val="visible"/>
+                                      </p:to>
+                                    </p:set>
+                                    <p:anim calcmode="lin" valueType="num">
+                                      <p:cBhvr additive="base">
+                                        <p:cTn id="12" dur="500" fill="hold"/>
+                                        <p:tgtEl>
+                                          <p:spTgt spid="5"/>
+                                        </p:tgtEl>
+                                        <p:attrNameLst>
+                                          <p:attrName>ppt_x</p:attrName>
+                                        </p:attrNameLst>
+                                      </p:cBhvr>
+                                      <p:tavLst>
+                                        <p:tav tm="0">
+                                          <p:val>
+                                            <p:strVal val="#ppt_x"/>
+                                          </p:val>
+                                        </p:tav>
+                                        <p:tav tm="100000">
+                                          <p:val>
+                                            <p:strVal val="#ppt_x"/>
+                                          </p:val>
+                                        </p:tav>
+                                      </p:tavLst>
+                                    </p:anim>
+                                    <p:anim calcmode="lin" valueType="num">
+                                      <p:cBhvr additive="base">
+                                        <p:cTn id="13" dur="500" fill="hold"/>
+                                        <p:tgtEl>
+                                          <p:spTgt spid="5"/>
+                                        </p:tgtEl>
+                                        <p:attrNameLst>
+                                          <p:attrName>ppt_y</p:attrName>
+                                        </p:attrNameLst>
+                                      </p:cBhvr>
+                                      <p:tavLst>
+                                        <p:tav tm="0">
+                                          <p:val>
+                                            <p:strVal val="1+#ppt_h/2"/>
+                                          </p:val>
+                                        </p:tav>
+                                        <p:tav tm="100000">
+                                          <p:val>
+                                            <p:strVal val="#ppt_y"/>
+                                          </p:val>
+                                        </p:tav>
+                                      </p:tavLst>
+                                    </p:anim>
+                                  </p:childTnLst>
+                                </p:cTn>
+                              </p:par>
+                            </p:childTnLst>
+                          </p:cTn>
+                        </p:par>
+                      </p:childTnLst>
+                    </p:cTn>
+                  </p:par>
+                  <p:par>
+                    <p:cTn id="14" fill="hold">
+                      <p:stCondLst>
+                        <p:cond delay="indefinite"/>
+                      </p:stCondLst>
+                      <p:childTnLst>
+                        <p:par>
+                          <p:cTn id="15" fill="hold">
+                            <p:stCondLst>
+                              <p:cond delay="0"/>
+                            </p:stCondLst>
+                            <p:childTnLst>
+                              <p:par>
+                                <p:cTn id="16" presetID="10" presetClass="entr" presetSubtype="0" fill="hold" grpId="0" nodeType="clickEffect">
+                                  <p:stCondLst>
+                                    <p:cond delay="0"/>
+                                  </p:stCondLst>
+                                  <p:childTnLst>
+                                    <p:set>
+                                      <p:cBhvr>
+                                        <p:cTn id="17" dur="1" fill="hold">
+                                          <p:stCondLst>
+                                            <p:cond delay="0"/>
+                                          </p:stCondLst>
+                                        </p:cTn>
+                                        <p:tgtEl>
+                                          <p:spTgt spid="6"/>
+                                        </p:tgtEl>
+                                        <p:attrNameLst>
+                                          <p:attrName>style.visibility</p:attrName>
+                                        </p:attrNameLst>
+                                      </p:cBhvr>
+                                      <p:to>
+                                        <p:strVal val="visible"/>
+                                      </p:to>
+                                    </p:set>
+                                    <p:animEffect transition="in" filter="fade">
+                                      <p:cBhvr>
+                                        <p:cTn id="18" dur="500"/>
+                                        <p:tgtEl>
+                                          <p:spTgt spid="6"/>
+                                        </p:tgtEl>
+                                      </p:cBhvr>
+                                    </p:animEffect>
+                                  </p:childTnLst>
+                                </p:cTn>
+                              </p:par>
+                            </p:childTnLst>
+                          </p:cTn>
+                        </p:par>
+                      </p:childTnLst>
+                    </p:cTn>
+                  </p:par>
+                  <p:par>
+                    <p:cTn id="19" fill="hold">
+                      <p:stCondLst>
+                        <p:cond delay="indefinite"/>
+                      </p:stCondLst>
+                      <p:childTnLst>
+                        <p:par>
+                          <p:cTn id="20" fill="hold">
+                            <p:stCondLst>
+                              <p:cond delay="0"/>
+                            </p:stCondLst>
+                            <p:childTnLst>
+                              <p:par>
+                                <p:cTn id="21" presetID="42" presetClass="entr" presetSubtype="0" fill="hold" grpId="0" nodeType="clickEffect">
+                                  <p:stCondLst>
+                                    <p:cond delay="0"/>
+                                  </p:stCondLst>
+                                  <p:childTnLst>
+                                    <p:set>
+                                      <p:cBhvr>
+                                        <p:cTn id="22" dur="1" fill="hold">
+                                          <p:stCondLst>
+                                            <p:cond delay="0"/>
+                                          </p:stCondLst>
+                                        </p:cTn>
+                                        <p:tgtEl>
+                                          <p:spTgt spid="3">
+                                            <p:txEl>
+                                              <p:pRg st="0" end="0"/>
+                                            </p:txEl>
+                                          </p:spTgt>
+                                        </p:tgtEl>
+                                        <p:attrNameLst>
+                                          <p:attrName>style.visibility</p:attrName>
+                                        </p:attrNameLst>
+                                      </p:cBhvr>
+                                      <p:to>
+                                        <p:strVal val="visible"/>
+                                      </p:to>
+                                    </p:set>
+                                    <p:animEffect transition="in" filter="fade">
+                                      <p:cBhvr>
+                                        <p:cTn id="23" dur="1000"/>
+                                        <p:tgtEl>
+                                          <p:spTgt spid="3">
+                                            <p:txEl>
+                                              <p:pRg st="0" end="0"/>
+                                            </p:txEl>
+                                          </p:spTgt>
+                                        </p:tgtEl>
+                                      </p:cBhvr>
+                                    </p:animEffect>
+                                    <p:anim calcmode="lin" valueType="num">
+                                      <p:cBhvr>
+                                        <p:cTn id="24" dur="1000" fill="hold"/>
+                                        <p:tgtEl>
+                                          <p:spTgt spid="3">
+                                            <p:txEl>
+                                              <p:pRg st="0" end="0"/>
+                                            </p:txEl>
+                                          </p:spTgt>
+                                        </p:tgtEl>
+                                        <p:attrNameLst>
+                                          <p:attrName>ppt_x</p:attrName>
+                                        </p:attrNameLst>
+                                      </p:cBhvr>
+                                      <p:tavLst>
+                                        <p:tav tm="0">
+                                          <p:val>
+                                            <p:strVal val="#ppt_x"/>
+                                          </p:val>
+                                        </p:tav>
+                                        <p:tav tm="100000">
+                                          <p:val>
+                                            <p:strVal val="#ppt_x"/>
+                                          </p:val>
+                                        </p:tav>
+                                      </p:tavLst>
+                                    </p:anim>
+                                    <p:anim calcmode="lin" valueType="num">
+                                      <p:cBhvr>
+                                        <p:cTn id="25" dur="1000" fill="hold"/>
+                                        <p:tgtEl>
+                                          <p:spTgt spid="3">
+                                            <p:txEl>
+                                              <p:pRg st="0" end="0"/>
+                                            </p:txEl>
+                                          </p:spTgt>
+                                        </p:tgtEl>
+                                        <p:attrNameLst>
+                                          <p:attrName>ppt_y</p:attrName>
+                                        </p:attrNameLst>
+                                      </p:cBhvr>
+                                      <p:tavLst>
+                                        <p:tav tm="0">
+                                          <p:val>
+                                            <p:strVal val="#ppt_y+.1"/>
+                                          </p:val>
+                                        </p:tav>
+                                        <p:tav tm="100000">
+                                          <p:val>
+                                            <p:strVal val="#ppt_y"/>
+                                          </p:val>
+                                        </p:tav>
+                                      </p:tavLst>
+                                    </p:anim>
+                                  </p:childTnLst>
+                                </p:cTn>
+                              </p:par>
+                            </p:childTnLst>
+                          </p:cTn>
+                        </p:par>
+                      </p:childTnLst>
+                    </p:cTn>
+                  </p:par>
+                  <p:par>
+                    <p:cTn id="26" fill="hold">
+                      <p:stCondLst>
+                        <p:cond delay="indefinite"/>
+                      </p:stCondLst>
+                      <p:childTnLst>
+                        <p:par>
+                          <p:cTn id="27" fill="hold">
+                            <p:stCondLst>
+                              <p:cond delay="0"/>
+                            </p:stCondLst>
+                            <p:childTnLst>
+                              <p:par>
+                                <p:cTn id="28" presetID="42" presetClass="entr" presetSubtype="0" fill="hold" grpId="0" nodeType="clickEffect">
+                                  <p:stCondLst>
+                                    <p:cond delay="0"/>
+                                  </p:stCondLst>
+                                  <p:childTnLst>
+                                    <p:set>
+                                      <p:cBhvr>
+                                        <p:cTn id="29" dur="1" fill="hold">
+                                          <p:stCondLst>
+                                            <p:cond delay="0"/>
+                                          </p:stCondLst>
+                                        </p:cTn>
+                                        <p:tgtEl>
+                                          <p:spTgt spid="3">
+                                            <p:txEl>
+                                              <p:pRg st="1" end="1"/>
+                                            </p:txEl>
+                                          </p:spTgt>
+                                        </p:tgtEl>
+                                        <p:attrNameLst>
+                                          <p:attrName>style.visibility</p:attrName>
+                                        </p:attrNameLst>
+                                      </p:cBhvr>
+                                      <p:to>
+                                        <p:strVal val="visible"/>
+                                      </p:to>
+                                    </p:set>
+                                    <p:animEffect transition="in" filter="fade">
+                                      <p:cBhvr>
+                                        <p:cTn id="30" dur="1000"/>
+                                        <p:tgtEl>
+                                          <p:spTgt spid="3">
+                                            <p:txEl>
+                                              <p:pRg st="1" end="1"/>
+                                            </p:txEl>
+                                          </p:spTgt>
+                                        </p:tgtEl>
+                                      </p:cBhvr>
+                                    </p:animEffect>
+                                    <p:anim calcmode="lin" valueType="num">
+                                      <p:cBhvr>
+                                        <p:cTn id="31" dur="1000" fill="hold"/>
+                                        <p:tgtEl>
+                                          <p:spTgt spid="3">
+                                            <p:txEl>
+                                              <p:pRg st="1" end="1"/>
+                                            </p:txEl>
+                                          </p:spTgt>
+                                        </p:tgtEl>
+                                        <p:attrNameLst>
+                                          <p:attrName>ppt_x</p:attrName>
+                                        </p:attrNameLst>
+                                      </p:cBhvr>
+                                      <p:tavLst>
+                                        <p:tav tm="0">
+                                          <p:val>
+                                            <p:strVal val="#ppt_x"/>
+                                          </p:val>
+                                        </p:tav>
+                                        <p:tav tm="100000">
+                                          <p:val>
+                                            <p:strVal val="#ppt_x"/>
+                                          </p:val>
+                                        </p:tav>
+                                      </p:tavLst>
+                                    </p:anim>
+                                    <p:anim calcmode="lin" valueType="num">
+                                      <p:cBhvr>
+                                        <p:cTn id="32" dur="1000" fill="hold"/>
+                                        <p:tgtEl>
+                                          <p:spTgt spid="3">
+                                            <p:txEl>
+                                              <p:pRg st="1" end="1"/>
+                                            </p:txEl>
+                                          </p:spTgt>
+                                        </p:tgtEl>
+                                        <p:attrNameLst>
+                                          <p:attrName>ppt_y</p:attrName>
+                                        </p:attrNameLst>
+                                      </p:cBhvr>
+                                      <p:tavLst>
+                                        <p:tav tm="0">
+                                          <p:val>
+                                            <p:strVal val="#ppt_y+.1"/>
+                                          </p:val>
+                                        </p:tav>
+                                        <p:tav tm="100000">
+                                          <p:val>
+                                            <p:strVal val="#ppt_y"/>
+                                          </p:val>
+                                        </p:tav>
+                                      </p:tavLst>
+                                    </p:anim>
+                                  </p:childTnLst>
+                                </p:cTn>
+                              </p:par>
+                            </p:childTnLst>
+                          </p:cTn>
+                        </p:par>
+                      </p:childTnLst>
+                    </p:cTn>
+                  </p:par>
+                  <p:par>
+                    <p:cTn id="33" fill="hold">
+                      <p:stCondLst>
+                        <p:cond delay="indefinite"/>
+                      </p:stCondLst>
+                      <p:childTnLst>
+                        <p:par>
+                          <p:cTn id="34" fill="hold">
+                            <p:stCondLst>
+                              <p:cond delay="0"/>
+                            </p:stCondLst>
+                            <p:childTnLst>
+                              <p:par>
+                                <p:cTn id="35" presetID="42" presetClass="entr" presetSubtype="0" fill="hold" grpId="0" nodeType="clickEffect">
+                                  <p:stCondLst>
+                                    <p:cond delay="0"/>
+                                  </p:stCondLst>
+                                  <p:childTnLst>
+                                    <p:set>
+                                      <p:cBhvr>
+                                        <p:cTn id="36" dur="1" fill="hold">
+                                          <p:stCondLst>
+                                            <p:cond delay="0"/>
+                                          </p:stCondLst>
+                                        </p:cTn>
+                                        <p:tgtEl>
+                                          <p:spTgt spid="3">
+                                            <p:txEl>
+                                              <p:pRg st="2" end="2"/>
+                                            </p:txEl>
+                                          </p:spTgt>
+                                        </p:tgtEl>
+                                        <p:attrNameLst>
+                                          <p:attrName>style.visibility</p:attrName>
+                                        </p:attrNameLst>
+                                      </p:cBhvr>
+                                      <p:to>
+                                        <p:strVal val="visible"/>
+                                      </p:to>
+                                    </p:set>
+                                    <p:animEffect transition="in" filter="fade">
+                                      <p:cBhvr>
+                                        <p:cTn id="37" dur="1000"/>
+                                        <p:tgtEl>
+                                          <p:spTgt spid="3">
+                                            <p:txEl>
+                                              <p:pRg st="2" end="2"/>
+                                            </p:txEl>
+                                          </p:spTgt>
+                                        </p:tgtEl>
+                                      </p:cBhvr>
+                                    </p:animEffect>
+                                    <p:anim calcmode="lin" valueType="num">
+                                      <p:cBhvr>
+                                        <p:cTn id="38" dur="1000" fill="hold"/>
+                                        <p:tgtEl>
+                                          <p:spTgt spid="3">
+                                            <p:txEl>
+                                              <p:pRg st="2" end="2"/>
+                                            </p:txEl>
+                                          </p:spTgt>
+                                        </p:tgtEl>
+                                        <p:attrNameLst>
+                                          <p:attrName>ppt_x</p:attrName>
+                                        </p:attrNameLst>
+                                      </p:cBhvr>
+                                      <p:tavLst>
+                                        <p:tav tm="0">
+                                          <p:val>
+                                            <p:strVal val="#ppt_x"/>
+                                          </p:val>
+                                        </p:tav>
+                                        <p:tav tm="100000">
+                                          <p:val>
+                                            <p:strVal val="#ppt_x"/>
+                                          </p:val>
+                                        </p:tav>
+                                      </p:tavLst>
+                                    </p:anim>
+                                    <p:anim calcmode="lin" valueType="num">
+                                      <p:cBhvr>
+                                        <p:cTn id="39" dur="1000" fill="hold"/>
+                                        <p:tgtEl>
+                                          <p:spTgt spid="3">
+                                            <p:txEl>
+                                              <p:pRg st="2" end="2"/>
+                                            </p:txEl>
+                                          </p:spTgt>
+                                        </p:tgtEl>
+                                        <p:attrNameLst>
+                                          <p:attrName>ppt_y</p:attrName>
+                                        </p:attrNameLst>
+                                      </p:cBhvr>
+                                      <p:tavLst>
+                                        <p:tav tm="0">
+                                          <p:val>
+                                            <p:strVal val="#ppt_y+.1"/>
+                                          </p:val>
+                                        </p:tav>
+                                        <p:tav tm="100000">
+                                          <p:val>
+                                            <p:strVal val="#ppt_y"/>
+                                          </p:val>
+                                        </p:tav>
+                                      </p:tavLst>
+                                    </p:anim>
+                                  </p:childTnLst>
+                                </p:cTn>
+                              </p:par>
+                            </p:childTnLst>
+                          </p:cTn>
+                        </p:par>
+                      </p:childTnLst>
+                    </p:cTn>
+                  </p:par>
+                  <p:par>
+                    <p:cTn id="40" fill="hold">
+                      <p:stCondLst>
+                        <p:cond delay="indefinite"/>
+                      </p:stCondLst>
+                      <p:childTnLst>
+                        <p:par>
+                          <p:cTn id="41" fill="hold">
+                            <p:stCondLst>
+                              <p:cond delay="0"/>
+                            </p:stCondLst>
+                            <p:childTnLst>
+                              <p:par>
+                                <p:cTn id="42" presetID="42" presetClass="entr" presetSubtype="0" fill="hold" grpId="0" nodeType="clickEffect">
+                                  <p:stCondLst>
+                                    <p:cond delay="0"/>
+                                  </p:stCondLst>
+                                  <p:childTnLst>
+                                    <p:set>
+                                      <p:cBhvr>
+                                        <p:cTn id="43" dur="1" fill="hold">
+                                          <p:stCondLst>
+                                            <p:cond delay="0"/>
+                                          </p:stCondLst>
+                                        </p:cTn>
+                                        <p:tgtEl>
+                                          <p:spTgt spid="3">
+                                            <p:txEl>
+                                              <p:pRg st="3" end="3"/>
+                                            </p:txEl>
+                                          </p:spTgt>
+                                        </p:tgtEl>
+                                        <p:attrNameLst>
+                                          <p:attrName>style.visibility</p:attrName>
+                                        </p:attrNameLst>
+                                      </p:cBhvr>
+                                      <p:to>
+                                        <p:strVal val="visible"/>
+                                      </p:to>
+                                    </p:set>
+                                    <p:animEffect transition="in" filter="fade">
+                                      <p:cBhvr>
+                                        <p:cTn id="44" dur="1000"/>
+                                        <p:tgtEl>
+                                          <p:spTgt spid="3">
+                                            <p:txEl>
+                                              <p:pRg st="3" end="3"/>
+                                            </p:txEl>
+                                          </p:spTgt>
+                                        </p:tgtEl>
+                                      </p:cBhvr>
+                                    </p:animEffect>
+                                    <p:anim calcmode="lin" valueType="num">
+                                      <p:cBhvr>
+                                        <p:cTn id="45" dur="1000" fill="hold"/>
+                                        <p:tgtEl>
+                                          <p:spTgt spid="3">
+                                            <p:txEl>
+                                              <p:pRg st="3" end="3"/>
+                                            </p:txEl>
+                                          </p:spTgt>
+                                        </p:tgtEl>
+                                        <p:attrNameLst>
+                                          <p:attrName>ppt_x</p:attrName>
+                                        </p:attrNameLst>
+                                      </p:cBhvr>
+                                      <p:tavLst>
+                                        <p:tav tm="0">
+                                          <p:val>
+                                            <p:strVal val="#ppt_x"/>
+                                          </p:val>
+                                        </p:tav>
+                                        <p:tav tm="100000">
+                                          <p:val>
+                                            <p:strVal val="#ppt_x"/>
+                                          </p:val>
+                                        </p:tav>
+                                      </p:tavLst>
+                                    </p:anim>
+                                    <p:anim calcmode="lin" valueType="num">
+                                      <p:cBhvr>
+                                        <p:cTn id="46" dur="1000" fill="hold"/>
+                                        <p:tgtEl>
+                                          <p:spTgt spid="3">
+                                            <p:txEl>
+                                              <p:pRg st="3" end="3"/>
+                                            </p:txEl>
+                                          </p:spTgt>
+                                        </p:tgtEl>
+                                        <p:attrNameLst>
+                                          <p:attrName>ppt_y</p:attrName>
+                                        </p:attrNameLst>
+                                      </p:cBhvr>
+                                      <p:tavLst>
+                                        <p:tav tm="0">
+                                          <p:val>
+                                            <p:strVal val="#ppt_y+.1"/>
+                                          </p:val>
+                                        </p:tav>
+                                        <p:tav tm="100000">
+                                          <p:val>
+                                            <p:strVal val="#ppt_y"/>
+                                          </p:val>
+                                        </p:tav>
+                                      </p:tavLst>
+                                    </p:anim>
+                                  </p:childTnLst>
+                                </p:cTn>
+                              </p:par>
+                            </p:childTnLst>
+                          </p:cTn>
+                        </p:par>
+                      </p:childTnLst>
+                    </p:cTn>
+                  </p:par>
+                </p:childTnLst>
+              </p:cTn>
+              <p:prevCondLst>
+                <p:cond evt="onPrev" delay="0">
+                  <p:tgtEl>
+                    <p:sldTgt/>
+                  </p:tgtEl>
+                </p:cond>
+              </p:prevCondLst>
+              <p:nextCondLst>
+                <p:cond evt="onNext" delay="0">
+                  <p:tgtEl>
+                    <p:sldTgt/>
+                  </p:tgtEl>
+                </p:cond>
+              </p:nextCondLst>
+            </p:seq>
+          </p:childTnLst>
+        </p:cTn>
+      </p:par>
+    </p:tnLst>
+    <p:bldLst>
+      <p:bldP spid="2" grpId="0"/>
+      <p:bldP spid="3" grpId="0" build="p"/>
+      <p:bldP spid="5" grpId="0"/>
+      <p:bldP spid="6" grpId="0"/>
+    </p:bldLst>
+  </p:timing>
 </p:sld>
 </file>
 
@@ -13422,6 +16680,454 @@
   <p:clrMapOvr>
     <a:masterClrMapping/>
   </p:clrMapOvr>
+  <p:timing>
+    <p:tnLst>
+      <p:par>
+        <p:cTn id="1" dur="indefinite" restart="never" nodeType="tmRoot">
+          <p:childTnLst>
+            <p:seq concurrent="1" nextAc="seek">
+              <p:cTn id="2" dur="indefinite" nodeType="mainSeq">
+                <p:childTnLst>
+                  <p:par>
+                    <p:cTn id="3" fill="hold">
+                      <p:stCondLst>
+                        <p:cond delay="indefinite"/>
+                      </p:stCondLst>
+                      <p:childTnLst>
+                        <p:par>
+                          <p:cTn id="4" fill="hold">
+                            <p:stCondLst>
+                              <p:cond delay="0"/>
+                            </p:stCondLst>
+                            <p:childTnLst>
+                              <p:par>
+                                <p:cTn id="5" presetID="10" presetClass="entr" presetSubtype="0" fill="hold" grpId="0" nodeType="clickEffect">
+                                  <p:stCondLst>
+                                    <p:cond delay="0"/>
+                                  </p:stCondLst>
+                                  <p:childTnLst>
+                                    <p:set>
+                                      <p:cBhvr>
+                                        <p:cTn id="6" dur="1" fill="hold">
+                                          <p:stCondLst>
+                                            <p:cond delay="0"/>
+                                          </p:stCondLst>
+                                        </p:cTn>
+                                        <p:tgtEl>
+                                          <p:spTgt spid="4"/>
+                                        </p:tgtEl>
+                                        <p:attrNameLst>
+                                          <p:attrName>style.visibility</p:attrName>
+                                        </p:attrNameLst>
+                                      </p:cBhvr>
+                                      <p:to>
+                                        <p:strVal val="visible"/>
+                                      </p:to>
+                                    </p:set>
+                                    <p:animEffect transition="in" filter="fade">
+                                      <p:cBhvr>
+                                        <p:cTn id="7" dur="500"/>
+                                        <p:tgtEl>
+                                          <p:spTgt spid="4"/>
+                                        </p:tgtEl>
+                                      </p:cBhvr>
+                                    </p:animEffect>
+                                  </p:childTnLst>
+                                </p:cTn>
+                              </p:par>
+                            </p:childTnLst>
+                          </p:cTn>
+                        </p:par>
+                      </p:childTnLst>
+                    </p:cTn>
+                  </p:par>
+                  <p:par>
+                    <p:cTn id="8" fill="hold">
+                      <p:stCondLst>
+                        <p:cond delay="indefinite"/>
+                      </p:stCondLst>
+                      <p:childTnLst>
+                        <p:par>
+                          <p:cTn id="9" fill="hold">
+                            <p:stCondLst>
+                              <p:cond delay="0"/>
+                            </p:stCondLst>
+                            <p:childTnLst>
+                              <p:par>
+                                <p:cTn id="10" presetID="22" presetClass="entr" presetSubtype="4" fill="hold" grpId="0" nodeType="clickEffect">
+                                  <p:stCondLst>
+                                    <p:cond delay="0"/>
+                                  </p:stCondLst>
+                                  <p:childTnLst>
+                                    <p:set>
+                                      <p:cBhvr>
+                                        <p:cTn id="11" dur="1" fill="hold">
+                                          <p:stCondLst>
+                                            <p:cond delay="0"/>
+                                          </p:stCondLst>
+                                        </p:cTn>
+                                        <p:tgtEl>
+                                          <p:spTgt spid="8"/>
+                                        </p:tgtEl>
+                                        <p:attrNameLst>
+                                          <p:attrName>style.visibility</p:attrName>
+                                        </p:attrNameLst>
+                                      </p:cBhvr>
+                                      <p:to>
+                                        <p:strVal val="visible"/>
+                                      </p:to>
+                                    </p:set>
+                                    <p:animEffect transition="in" filter="wipe(down)">
+                                      <p:cBhvr>
+                                        <p:cTn id="12" dur="500"/>
+                                        <p:tgtEl>
+                                          <p:spTgt spid="8"/>
+                                        </p:tgtEl>
+                                      </p:cBhvr>
+                                    </p:animEffect>
+                                  </p:childTnLst>
+                                </p:cTn>
+                              </p:par>
+                            </p:childTnLst>
+                          </p:cTn>
+                        </p:par>
+                      </p:childTnLst>
+                    </p:cTn>
+                  </p:par>
+                  <p:par>
+                    <p:cTn id="13" fill="hold">
+                      <p:stCondLst>
+                        <p:cond delay="indefinite"/>
+                      </p:stCondLst>
+                      <p:childTnLst>
+                        <p:par>
+                          <p:cTn id="14" fill="hold">
+                            <p:stCondLst>
+                              <p:cond delay="0"/>
+                            </p:stCondLst>
+                            <p:childTnLst>
+                              <p:par>
+                                <p:cTn id="15" presetID="10" presetClass="entr" presetSubtype="0" fill="hold" grpId="0" nodeType="clickEffect">
+                                  <p:stCondLst>
+                                    <p:cond delay="0"/>
+                                  </p:stCondLst>
+                                  <p:childTnLst>
+                                    <p:set>
+                                      <p:cBhvr>
+                                        <p:cTn id="16" dur="1" fill="hold">
+                                          <p:stCondLst>
+                                            <p:cond delay="0"/>
+                                          </p:stCondLst>
+                                        </p:cTn>
+                                        <p:tgtEl>
+                                          <p:spTgt spid="5"/>
+                                        </p:tgtEl>
+                                        <p:attrNameLst>
+                                          <p:attrName>style.visibility</p:attrName>
+                                        </p:attrNameLst>
+                                      </p:cBhvr>
+                                      <p:to>
+                                        <p:strVal val="visible"/>
+                                      </p:to>
+                                    </p:set>
+                                    <p:animEffect transition="in" filter="fade">
+                                      <p:cBhvr>
+                                        <p:cTn id="17" dur="500"/>
+                                        <p:tgtEl>
+                                          <p:spTgt spid="5"/>
+                                        </p:tgtEl>
+                                      </p:cBhvr>
+                                    </p:animEffect>
+                                  </p:childTnLst>
+                                </p:cTn>
+                              </p:par>
+                            </p:childTnLst>
+                          </p:cTn>
+                        </p:par>
+                      </p:childTnLst>
+                    </p:cTn>
+                  </p:par>
+                  <p:par>
+                    <p:cTn id="18" fill="hold">
+                      <p:stCondLst>
+                        <p:cond delay="indefinite"/>
+                      </p:stCondLst>
+                      <p:childTnLst>
+                        <p:par>
+                          <p:cTn id="19" fill="hold">
+                            <p:stCondLst>
+                              <p:cond delay="0"/>
+                            </p:stCondLst>
+                            <p:childTnLst>
+                              <p:par>
+                                <p:cTn id="20" presetID="42" presetClass="entr" presetSubtype="0" fill="hold" grpId="0" nodeType="clickEffect">
+                                  <p:stCondLst>
+                                    <p:cond delay="0"/>
+                                  </p:stCondLst>
+                                  <p:childTnLst>
+                                    <p:set>
+                                      <p:cBhvr>
+                                        <p:cTn id="21" dur="1" fill="hold">
+                                          <p:stCondLst>
+                                            <p:cond delay="0"/>
+                                          </p:stCondLst>
+                                        </p:cTn>
+                                        <p:tgtEl>
+                                          <p:spTgt spid="10"/>
+                                        </p:tgtEl>
+                                        <p:attrNameLst>
+                                          <p:attrName>style.visibility</p:attrName>
+                                        </p:attrNameLst>
+                                      </p:cBhvr>
+                                      <p:to>
+                                        <p:strVal val="visible"/>
+                                      </p:to>
+                                    </p:set>
+                                    <p:animEffect transition="in" filter="fade">
+                                      <p:cBhvr>
+                                        <p:cTn id="22" dur="1000"/>
+                                        <p:tgtEl>
+                                          <p:spTgt spid="10"/>
+                                        </p:tgtEl>
+                                      </p:cBhvr>
+                                    </p:animEffect>
+                                    <p:anim calcmode="lin" valueType="num">
+                                      <p:cBhvr>
+                                        <p:cTn id="23" dur="1000" fill="hold"/>
+                                        <p:tgtEl>
+                                          <p:spTgt spid="10"/>
+                                        </p:tgtEl>
+                                        <p:attrNameLst>
+                                          <p:attrName>ppt_x</p:attrName>
+                                        </p:attrNameLst>
+                                      </p:cBhvr>
+                                      <p:tavLst>
+                                        <p:tav tm="0">
+                                          <p:val>
+                                            <p:strVal val="#ppt_x"/>
+                                          </p:val>
+                                        </p:tav>
+                                        <p:tav tm="100000">
+                                          <p:val>
+                                            <p:strVal val="#ppt_x"/>
+                                          </p:val>
+                                        </p:tav>
+                                      </p:tavLst>
+                                    </p:anim>
+                                    <p:anim calcmode="lin" valueType="num">
+                                      <p:cBhvr>
+                                        <p:cTn id="24" dur="1000" fill="hold"/>
+                                        <p:tgtEl>
+                                          <p:spTgt spid="10"/>
+                                        </p:tgtEl>
+                                        <p:attrNameLst>
+                                          <p:attrName>ppt_y</p:attrName>
+                                        </p:attrNameLst>
+                                      </p:cBhvr>
+                                      <p:tavLst>
+                                        <p:tav tm="0">
+                                          <p:val>
+                                            <p:strVal val="#ppt_y+.1"/>
+                                          </p:val>
+                                        </p:tav>
+                                        <p:tav tm="100000">
+                                          <p:val>
+                                            <p:strVal val="#ppt_y"/>
+                                          </p:val>
+                                        </p:tav>
+                                      </p:tavLst>
+                                    </p:anim>
+                                  </p:childTnLst>
+                                </p:cTn>
+                              </p:par>
+                            </p:childTnLst>
+                          </p:cTn>
+                        </p:par>
+                      </p:childTnLst>
+                    </p:cTn>
+                  </p:par>
+                  <p:par>
+                    <p:cTn id="25" fill="hold">
+                      <p:stCondLst>
+                        <p:cond delay="indefinite"/>
+                      </p:stCondLst>
+                      <p:childTnLst>
+                        <p:par>
+                          <p:cTn id="26" fill="hold">
+                            <p:stCondLst>
+                              <p:cond delay="0"/>
+                            </p:stCondLst>
+                            <p:childTnLst>
+                              <p:par>
+                                <p:cTn id="27" presetID="10" presetClass="entr" presetSubtype="0" fill="hold" grpId="0" nodeType="clickEffect">
+                                  <p:stCondLst>
+                                    <p:cond delay="0"/>
+                                  </p:stCondLst>
+                                  <p:childTnLst>
+                                    <p:set>
+                                      <p:cBhvr>
+                                        <p:cTn id="28" dur="1" fill="hold">
+                                          <p:stCondLst>
+                                            <p:cond delay="0"/>
+                                          </p:stCondLst>
+                                        </p:cTn>
+                                        <p:tgtEl>
+                                          <p:spTgt spid="6"/>
+                                        </p:tgtEl>
+                                        <p:attrNameLst>
+                                          <p:attrName>style.visibility</p:attrName>
+                                        </p:attrNameLst>
+                                      </p:cBhvr>
+                                      <p:to>
+                                        <p:strVal val="visible"/>
+                                      </p:to>
+                                    </p:set>
+                                    <p:animEffect transition="in" filter="fade">
+                                      <p:cBhvr>
+                                        <p:cTn id="29" dur="500"/>
+                                        <p:tgtEl>
+                                          <p:spTgt spid="6"/>
+                                        </p:tgtEl>
+                                      </p:cBhvr>
+                                    </p:animEffect>
+                                  </p:childTnLst>
+                                </p:cTn>
+                              </p:par>
+                            </p:childTnLst>
+                          </p:cTn>
+                        </p:par>
+                      </p:childTnLst>
+                    </p:cTn>
+                  </p:par>
+                  <p:par>
+                    <p:cTn id="30" fill="hold">
+                      <p:stCondLst>
+                        <p:cond delay="indefinite"/>
+                      </p:stCondLst>
+                      <p:childTnLst>
+                        <p:par>
+                          <p:cTn id="31" fill="hold">
+                            <p:stCondLst>
+                              <p:cond delay="0"/>
+                            </p:stCondLst>
+                            <p:childTnLst>
+                              <p:par>
+                                <p:cTn id="32" presetID="42" presetClass="entr" presetSubtype="0" fill="hold" grpId="0" nodeType="clickEffect">
+                                  <p:stCondLst>
+                                    <p:cond delay="0"/>
+                                  </p:stCondLst>
+                                  <p:childTnLst>
+                                    <p:set>
+                                      <p:cBhvr>
+                                        <p:cTn id="33" dur="1" fill="hold">
+                                          <p:stCondLst>
+                                            <p:cond delay="0"/>
+                                          </p:stCondLst>
+                                        </p:cTn>
+                                        <p:tgtEl>
+                                          <p:spTgt spid="12"/>
+                                        </p:tgtEl>
+                                        <p:attrNameLst>
+                                          <p:attrName>style.visibility</p:attrName>
+                                        </p:attrNameLst>
+                                      </p:cBhvr>
+                                      <p:to>
+                                        <p:strVal val="visible"/>
+                                      </p:to>
+                                    </p:set>
+                                    <p:animEffect transition="in" filter="fade">
+                                      <p:cBhvr>
+                                        <p:cTn id="34" dur="1000"/>
+                                        <p:tgtEl>
+                                          <p:spTgt spid="12"/>
+                                        </p:tgtEl>
+                                      </p:cBhvr>
+                                    </p:animEffect>
+                                    <p:anim calcmode="lin" valueType="num">
+                                      <p:cBhvr>
+                                        <p:cTn id="35" dur="1000" fill="hold"/>
+                                        <p:tgtEl>
+                                          <p:spTgt spid="12"/>
+                                        </p:tgtEl>
+                                        <p:attrNameLst>
+                                          <p:attrName>ppt_x</p:attrName>
+                                        </p:attrNameLst>
+                                      </p:cBhvr>
+                                      <p:tavLst>
+                                        <p:tav tm="0">
+                                          <p:val>
+                                            <p:strVal val="#ppt_x"/>
+                                          </p:val>
+                                        </p:tav>
+                                        <p:tav tm="100000">
+                                          <p:val>
+                                            <p:strVal val="#ppt_x"/>
+                                          </p:val>
+                                        </p:tav>
+                                      </p:tavLst>
+                                    </p:anim>
+                                    <p:anim calcmode="lin" valueType="num">
+                                      <p:cBhvr>
+                                        <p:cTn id="36" dur="1000" fill="hold"/>
+                                        <p:tgtEl>
+                                          <p:spTgt spid="12"/>
+                                        </p:tgtEl>
+                                        <p:attrNameLst>
+                                          <p:attrName>ppt_y</p:attrName>
+                                        </p:attrNameLst>
+                                      </p:cBhvr>
+                                      <p:tavLst>
+                                        <p:tav tm="0">
+                                          <p:val>
+                                            <p:strVal val="#ppt_y+.1"/>
+                                          </p:val>
+                                        </p:tav>
+                                        <p:tav tm="100000">
+                                          <p:val>
+                                            <p:strVal val="#ppt_y"/>
+                                          </p:val>
+                                        </p:tav>
+                                      </p:tavLst>
+                                    </p:anim>
+                                  </p:childTnLst>
+                                </p:cTn>
+                              </p:par>
+                            </p:childTnLst>
+                          </p:cTn>
+                        </p:par>
+                      </p:childTnLst>
+                    </p:cTn>
+                  </p:par>
+                </p:childTnLst>
+              </p:cTn>
+              <p:prevCondLst>
+                <p:cond evt="onPrev" delay="0">
+                  <p:tgtEl>
+                    <p:sldTgt/>
+                  </p:tgtEl>
+                </p:cond>
+              </p:prevCondLst>
+              <p:nextCondLst>
+                <p:cond evt="onNext" delay="0">
+                  <p:tgtEl>
+                    <p:sldTgt/>
+                  </p:tgtEl>
+                </p:cond>
+              </p:nextCondLst>
+            </p:seq>
+          </p:childTnLst>
+        </p:cTn>
+      </p:par>
+    </p:tnLst>
+    <p:bldLst>
+      <p:bldP spid="4" grpId="0"/>
+      <p:bldP spid="5" grpId="0"/>
+      <p:bldP spid="6" grpId="0"/>
+      <p:bldP spid="8" grpId="0"/>
+      <p:bldP spid="10" grpId="0"/>
+      <p:bldP spid="12" grpId="0"/>
+    </p:bldLst>
+  </p:timing>
 </p:sld>
 </file>
 
@@ -13460,7 +17166,7 @@
         </p:nvSpPr>
         <p:spPr>
           <a:xfrm>
-            <a:off x="724394" y="0"/>
+            <a:off x="724394" y="816135"/>
             <a:ext cx="9601200" cy="549275"/>
           </a:xfrm>
         </p:spPr>
@@ -13473,41 +17179,6 @@
             <a:r>
               <a:rPr lang="es-PE" dirty="0"/>
               <a:t>METODOLOGÍA </a:t>
-            </a:r>
-          </a:p>
-        </p:txBody>
-      </p:sp>
-      <p:sp>
-        <p:nvSpPr>
-          <p:cNvPr id="4" name="CuadroTexto 3">
-            <a:extLst>
-              <a:ext uri="{FF2B5EF4-FFF2-40B4-BE49-F238E27FC236}">
-                <a16:creationId xmlns:a16="http://schemas.microsoft.com/office/drawing/2014/main" id="{5892278D-583D-1C71-9044-9C082D47FF54}"/>
-              </a:ext>
-            </a:extLst>
-          </p:cNvPr>
-          <p:cNvSpPr txBox="1"/>
-          <p:nvPr/>
-        </p:nvSpPr>
-        <p:spPr>
-          <a:xfrm>
-            <a:off x="819397" y="921839"/>
-            <a:ext cx="3408219" cy="369332"/>
-          </a:xfrm>
-          <a:prstGeom prst="rect">
-            <a:avLst/>
-          </a:prstGeom>
-          <a:noFill/>
-        </p:spPr>
-        <p:txBody>
-          <a:bodyPr wrap="square" rtlCol="0">
-            <a:spAutoFit/>
-          </a:bodyPr>
-          <a:lstStyle/>
-          <a:p>
-            <a:r>
-              <a:rPr lang="es-PE" b="1" dirty="0"/>
-              <a:t>TIPO DE INVESTIGACIÓN : </a:t>
             </a:r>
           </a:p>
         </p:txBody>
@@ -13526,8 +17197,8 @@
         </p:nvSpPr>
         <p:spPr>
           <a:xfrm>
-            <a:off x="4552085" y="985407"/>
-            <a:ext cx="3153022" cy="369332"/>
+            <a:off x="4766069" y="1816970"/>
+            <a:ext cx="3153022" cy="400110"/>
           </a:xfrm>
           <a:prstGeom prst="rect">
             <a:avLst/>
@@ -13541,43 +17212,8 @@
           <a:lstStyle/>
           <a:p>
             <a:r>
-              <a:rPr lang="es-PE" dirty="0"/>
+              <a:rPr lang="es-PE" sz="2000" dirty="0"/>
               <a:t>La investigación fue aplicada</a:t>
-            </a:r>
-          </a:p>
-        </p:txBody>
-      </p:sp>
-      <p:sp>
-        <p:nvSpPr>
-          <p:cNvPr id="6" name="CuadroTexto 5">
-            <a:extLst>
-              <a:ext uri="{FF2B5EF4-FFF2-40B4-BE49-F238E27FC236}">
-                <a16:creationId xmlns:a16="http://schemas.microsoft.com/office/drawing/2014/main" id="{DCD8D16F-E0F4-F8A8-5D58-944384A80BDB}"/>
-              </a:ext>
-            </a:extLst>
-          </p:cNvPr>
-          <p:cNvSpPr txBox="1"/>
-          <p:nvPr/>
-        </p:nvSpPr>
-        <p:spPr>
-          <a:xfrm>
-            <a:off x="660194" y="1863703"/>
-            <a:ext cx="3598224" cy="369332"/>
-          </a:xfrm>
-          <a:prstGeom prst="rect">
-            <a:avLst/>
-          </a:prstGeom>
-          <a:noFill/>
-        </p:spPr>
-        <p:txBody>
-          <a:bodyPr wrap="square" rtlCol="0">
-            <a:spAutoFit/>
-          </a:bodyPr>
-          <a:lstStyle/>
-          <a:p>
-            <a:r>
-              <a:rPr lang="es-PE" b="1" dirty="0"/>
-              <a:t>DISEÑO DE INVESTIGACIÓN : </a:t>
             </a:r>
           </a:p>
         </p:txBody>
@@ -13596,8 +17232,8 @@
         </p:nvSpPr>
         <p:spPr>
           <a:xfrm>
-            <a:off x="4552085" y="1863703"/>
-            <a:ext cx="4838948" cy="369332"/>
+            <a:off x="4415337" y="3212011"/>
+            <a:ext cx="4838948" cy="400110"/>
           </a:xfrm>
           <a:prstGeom prst="rect">
             <a:avLst/>
@@ -13611,43 +17247,8 @@
           <a:lstStyle/>
           <a:p>
             <a:r>
-              <a:rPr lang="es-PE" dirty="0"/>
-              <a:t>Fue no experimental no transversal correlacional </a:t>
-            </a:r>
-          </a:p>
-        </p:txBody>
-      </p:sp>
-      <p:sp>
-        <p:nvSpPr>
-          <p:cNvPr id="8" name="CuadroTexto 7">
-            <a:extLst>
-              <a:ext uri="{FF2B5EF4-FFF2-40B4-BE49-F238E27FC236}">
-                <a16:creationId xmlns:a16="http://schemas.microsoft.com/office/drawing/2014/main" id="{8EC2B100-278D-5DF8-FFA7-2BE613558FBE}"/>
-              </a:ext>
-            </a:extLst>
-          </p:cNvPr>
-          <p:cNvSpPr txBox="1"/>
-          <p:nvPr/>
-        </p:nvSpPr>
-        <p:spPr>
-          <a:xfrm>
-            <a:off x="819398" y="2596926"/>
-            <a:ext cx="3598224" cy="646331"/>
-          </a:xfrm>
-          <a:prstGeom prst="rect">
-            <a:avLst/>
-          </a:prstGeom>
-          <a:noFill/>
-        </p:spPr>
-        <p:txBody>
-          <a:bodyPr wrap="square" rtlCol="0">
-            <a:spAutoFit/>
-          </a:bodyPr>
-          <a:lstStyle/>
-          <a:p>
-            <a:r>
-              <a:rPr lang="es-PE" b="1" dirty="0"/>
-              <a:t>NIVEL O ALCANCE DE INVESTIGACIÓN : </a:t>
+              <a:rPr lang="es-PE" sz="2000" dirty="0"/>
+              <a:t> No experimental no transversal correlacional </a:t>
             </a:r>
           </a:p>
         </p:txBody>
@@ -13666,8 +17267,8 @@
         </p:nvSpPr>
         <p:spPr>
           <a:xfrm>
-            <a:off x="4552085" y="2681165"/>
-            <a:ext cx="3707204" cy="369332"/>
+            <a:off x="4655339" y="4846942"/>
+            <a:ext cx="3707204" cy="400110"/>
           </a:xfrm>
           <a:prstGeom prst="rect">
             <a:avLst/>
@@ -13681,9 +17282,178 @@
           <a:lstStyle/>
           <a:p>
             <a:r>
-              <a:rPr lang="es-PE" dirty="0"/>
-              <a:t>Fue descriptivo – correlacional  </a:t>
-            </a:r>
+              <a:rPr lang="es-PE" sz="2000" dirty="0"/>
+              <a:t>Descriptivo – correlacional  </a:t>
+            </a:r>
+          </a:p>
+        </p:txBody>
+      </p:sp>
+      <p:sp>
+        <p:nvSpPr>
+          <p:cNvPr id="3" name="Flecha: pentágono 2">
+            <a:extLst>
+              <a:ext uri="{FF2B5EF4-FFF2-40B4-BE49-F238E27FC236}">
+                <a16:creationId xmlns:a16="http://schemas.microsoft.com/office/drawing/2014/main" id="{22D76C16-2DD0-9174-1970-32C017B9CBEF}"/>
+              </a:ext>
+            </a:extLst>
+          </p:cNvPr>
+          <p:cNvSpPr/>
+          <p:nvPr/>
+        </p:nvSpPr>
+        <p:spPr>
+          <a:xfrm>
+            <a:off x="819397" y="1627021"/>
+            <a:ext cx="3503221" cy="926562"/>
+          </a:xfrm>
+          <a:prstGeom prst="homePlate">
+            <a:avLst/>
+          </a:prstGeom>
+        </p:spPr>
+        <p:style>
+          <a:lnRef idx="2">
+            <a:schemeClr val="accent3">
+              <a:shade val="15000"/>
+            </a:schemeClr>
+          </a:lnRef>
+          <a:fillRef idx="1">
+            <a:schemeClr val="accent3"/>
+          </a:fillRef>
+          <a:effectRef idx="0">
+            <a:schemeClr val="accent3"/>
+          </a:effectRef>
+          <a:fontRef idx="minor">
+            <a:schemeClr val="lt1"/>
+          </a:fontRef>
+        </p:style>
+        <p:txBody>
+          <a:bodyPr rtlCol="0" anchor="ctr"/>
+          <a:lstStyle/>
+          <a:p>
+            <a:pPr algn="ctr"/>
+            <a:endParaRPr lang="es-PE" sz="1800" b="1" dirty="0"/>
+          </a:p>
+          <a:p>
+            <a:pPr algn="ctr"/>
+            <a:r>
+              <a:rPr lang="es-PE" sz="1800" b="1" dirty="0"/>
+              <a:t>TIPO DE INVESTIGACIÓN : </a:t>
+            </a:r>
+          </a:p>
+          <a:p>
+            <a:pPr algn="ctr"/>
+            <a:endParaRPr lang="es-PE" dirty="0"/>
+          </a:p>
+        </p:txBody>
+      </p:sp>
+      <p:sp>
+        <p:nvSpPr>
+          <p:cNvPr id="10" name="Flecha: pentágono 9">
+            <a:extLst>
+              <a:ext uri="{FF2B5EF4-FFF2-40B4-BE49-F238E27FC236}">
+                <a16:creationId xmlns:a16="http://schemas.microsoft.com/office/drawing/2014/main" id="{7C5A66C8-F42F-351C-1B81-CBBEAEC85DF4}"/>
+              </a:ext>
+            </a:extLst>
+          </p:cNvPr>
+          <p:cNvSpPr/>
+          <p:nvPr/>
+        </p:nvSpPr>
+        <p:spPr>
+          <a:xfrm>
+            <a:off x="819397" y="2965719"/>
+            <a:ext cx="3503221" cy="926562"/>
+          </a:xfrm>
+          <a:prstGeom prst="homePlate">
+            <a:avLst/>
+          </a:prstGeom>
+        </p:spPr>
+        <p:style>
+          <a:lnRef idx="2">
+            <a:schemeClr val="accent3">
+              <a:shade val="15000"/>
+            </a:schemeClr>
+          </a:lnRef>
+          <a:fillRef idx="1">
+            <a:schemeClr val="accent3"/>
+          </a:fillRef>
+          <a:effectRef idx="0">
+            <a:schemeClr val="accent3"/>
+          </a:effectRef>
+          <a:fontRef idx="minor">
+            <a:schemeClr val="lt1"/>
+          </a:fontRef>
+        </p:style>
+        <p:txBody>
+          <a:bodyPr rtlCol="0" anchor="ctr"/>
+          <a:lstStyle/>
+          <a:p>
+            <a:pPr algn="ctr"/>
+            <a:endParaRPr lang="es-PE" sz="1800" b="1" dirty="0"/>
+          </a:p>
+          <a:p>
+            <a:r>
+              <a:rPr lang="es-PE" sz="1800" b="1" dirty="0"/>
+              <a:t>DISEÑO DE INVESTIGACIÓN : </a:t>
+            </a:r>
+          </a:p>
+          <a:p>
+            <a:pPr algn="ctr"/>
+            <a:endParaRPr lang="es-PE" dirty="0"/>
+          </a:p>
+        </p:txBody>
+      </p:sp>
+      <p:sp>
+        <p:nvSpPr>
+          <p:cNvPr id="11" name="Flecha: pentágono 10">
+            <a:extLst>
+              <a:ext uri="{FF2B5EF4-FFF2-40B4-BE49-F238E27FC236}">
+                <a16:creationId xmlns:a16="http://schemas.microsoft.com/office/drawing/2014/main" id="{928671B5-31D8-81FE-1F6A-4A77140A2279}"/>
+              </a:ext>
+            </a:extLst>
+          </p:cNvPr>
+          <p:cNvSpPr/>
+          <p:nvPr/>
+        </p:nvSpPr>
+        <p:spPr>
+          <a:xfrm>
+            <a:off x="914400" y="4583716"/>
+            <a:ext cx="3503221" cy="926562"/>
+          </a:xfrm>
+          <a:prstGeom prst="homePlate">
+            <a:avLst/>
+          </a:prstGeom>
+        </p:spPr>
+        <p:style>
+          <a:lnRef idx="2">
+            <a:schemeClr val="accent3">
+              <a:shade val="15000"/>
+            </a:schemeClr>
+          </a:lnRef>
+          <a:fillRef idx="1">
+            <a:schemeClr val="accent3"/>
+          </a:fillRef>
+          <a:effectRef idx="0">
+            <a:schemeClr val="accent3"/>
+          </a:effectRef>
+          <a:fontRef idx="minor">
+            <a:schemeClr val="lt1"/>
+          </a:fontRef>
+        </p:style>
+        <p:txBody>
+          <a:bodyPr rtlCol="0" anchor="ctr"/>
+          <a:lstStyle/>
+          <a:p>
+            <a:pPr algn="ctr"/>
+            <a:endParaRPr lang="es-PE" sz="1800" b="1" dirty="0"/>
+          </a:p>
+          <a:p>
+            <a:r>
+              <a:rPr lang="es-PE" b="1" dirty="0"/>
+              <a:t>NIVEL O ALCANCE DE INVESTIGACIÓN : </a:t>
+            </a:r>
+          </a:p>
+          <a:p>
+            <a:pPr algn="ctr"/>
+            <a:endParaRPr lang="es-PE" dirty="0"/>
           </a:p>
         </p:txBody>
       </p:sp>
@@ -13697,6 +17467,546 @@
   <p:clrMapOvr>
     <a:masterClrMapping/>
   </p:clrMapOvr>
+  <p:timing>
+    <p:tnLst>
+      <p:par>
+        <p:cTn id="1" dur="indefinite" restart="never" nodeType="tmRoot">
+          <p:childTnLst>
+            <p:seq concurrent="1" nextAc="seek">
+              <p:cTn id="2" dur="indefinite" nodeType="mainSeq">
+                <p:childTnLst>
+                  <p:par>
+                    <p:cTn id="3" fill="hold">
+                      <p:stCondLst>
+                        <p:cond delay="indefinite"/>
+                      </p:stCondLst>
+                      <p:childTnLst>
+                        <p:par>
+                          <p:cTn id="4" fill="hold">
+                            <p:stCondLst>
+                              <p:cond delay="0"/>
+                            </p:stCondLst>
+                            <p:childTnLst>
+                              <p:par>
+                                <p:cTn id="5" presetID="10" presetClass="entr" presetSubtype="0" fill="hold" grpId="0" nodeType="clickEffect">
+                                  <p:stCondLst>
+                                    <p:cond delay="0"/>
+                                  </p:stCondLst>
+                                  <p:childTnLst>
+                                    <p:set>
+                                      <p:cBhvr>
+                                        <p:cTn id="6" dur="1" fill="hold">
+                                          <p:stCondLst>
+                                            <p:cond delay="0"/>
+                                          </p:stCondLst>
+                                        </p:cTn>
+                                        <p:tgtEl>
+                                          <p:spTgt spid="3"/>
+                                        </p:tgtEl>
+                                        <p:attrNameLst>
+                                          <p:attrName>style.visibility</p:attrName>
+                                        </p:attrNameLst>
+                                      </p:cBhvr>
+                                      <p:to>
+                                        <p:strVal val="visible"/>
+                                      </p:to>
+                                    </p:set>
+                                    <p:animEffect transition="in" filter="fade">
+                                      <p:cBhvr>
+                                        <p:cTn id="7" dur="500"/>
+                                        <p:tgtEl>
+                                          <p:spTgt spid="3"/>
+                                        </p:tgtEl>
+                                      </p:cBhvr>
+                                    </p:animEffect>
+                                  </p:childTnLst>
+                                </p:cTn>
+                              </p:par>
+                            </p:childTnLst>
+                          </p:cTn>
+                        </p:par>
+                      </p:childTnLst>
+                    </p:cTn>
+                  </p:par>
+                  <p:par>
+                    <p:cTn id="8" fill="hold">
+                      <p:stCondLst>
+                        <p:cond delay="indefinite"/>
+                      </p:stCondLst>
+                      <p:childTnLst>
+                        <p:par>
+                          <p:cTn id="9" fill="hold">
+                            <p:stCondLst>
+                              <p:cond delay="0"/>
+                            </p:stCondLst>
+                            <p:childTnLst>
+                              <p:par>
+                                <p:cTn id="10" presetID="31" presetClass="entr" presetSubtype="0" fill="hold" grpId="0" nodeType="clickEffect">
+                                  <p:stCondLst>
+                                    <p:cond delay="0"/>
+                                  </p:stCondLst>
+                                  <p:childTnLst>
+                                    <p:set>
+                                      <p:cBhvr>
+                                        <p:cTn id="11" dur="1" fill="hold">
+                                          <p:stCondLst>
+                                            <p:cond delay="0"/>
+                                          </p:stCondLst>
+                                        </p:cTn>
+                                        <p:tgtEl>
+                                          <p:spTgt spid="5"/>
+                                        </p:tgtEl>
+                                        <p:attrNameLst>
+                                          <p:attrName>style.visibility</p:attrName>
+                                        </p:attrNameLst>
+                                      </p:cBhvr>
+                                      <p:to>
+                                        <p:strVal val="visible"/>
+                                      </p:to>
+                                    </p:set>
+                                    <p:anim calcmode="lin" valueType="num">
+                                      <p:cBhvr>
+                                        <p:cTn id="12" dur="1000" fill="hold"/>
+                                        <p:tgtEl>
+                                          <p:spTgt spid="5"/>
+                                        </p:tgtEl>
+                                        <p:attrNameLst>
+                                          <p:attrName>ppt_w</p:attrName>
+                                        </p:attrNameLst>
+                                      </p:cBhvr>
+                                      <p:tavLst>
+                                        <p:tav tm="0">
+                                          <p:val>
+                                            <p:fltVal val="0"/>
+                                          </p:val>
+                                        </p:tav>
+                                        <p:tav tm="100000">
+                                          <p:val>
+                                            <p:strVal val="#ppt_w"/>
+                                          </p:val>
+                                        </p:tav>
+                                      </p:tavLst>
+                                    </p:anim>
+                                    <p:anim calcmode="lin" valueType="num">
+                                      <p:cBhvr>
+                                        <p:cTn id="13" dur="1000" fill="hold"/>
+                                        <p:tgtEl>
+                                          <p:spTgt spid="5"/>
+                                        </p:tgtEl>
+                                        <p:attrNameLst>
+                                          <p:attrName>ppt_h</p:attrName>
+                                        </p:attrNameLst>
+                                      </p:cBhvr>
+                                      <p:tavLst>
+                                        <p:tav tm="0">
+                                          <p:val>
+                                            <p:fltVal val="0"/>
+                                          </p:val>
+                                        </p:tav>
+                                        <p:tav tm="100000">
+                                          <p:val>
+                                            <p:strVal val="#ppt_h"/>
+                                          </p:val>
+                                        </p:tav>
+                                      </p:tavLst>
+                                    </p:anim>
+                                    <p:anim calcmode="lin" valueType="num">
+                                      <p:cBhvr>
+                                        <p:cTn id="14" dur="1000" fill="hold"/>
+                                        <p:tgtEl>
+                                          <p:spTgt spid="5"/>
+                                        </p:tgtEl>
+                                        <p:attrNameLst>
+                                          <p:attrName>style.rotation</p:attrName>
+                                        </p:attrNameLst>
+                                      </p:cBhvr>
+                                      <p:tavLst>
+                                        <p:tav tm="0">
+                                          <p:val>
+                                            <p:fltVal val="90"/>
+                                          </p:val>
+                                        </p:tav>
+                                        <p:tav tm="100000">
+                                          <p:val>
+                                            <p:fltVal val="0"/>
+                                          </p:val>
+                                        </p:tav>
+                                      </p:tavLst>
+                                    </p:anim>
+                                    <p:animEffect transition="in" filter="fade">
+                                      <p:cBhvr>
+                                        <p:cTn id="15" dur="1000"/>
+                                        <p:tgtEl>
+                                          <p:spTgt spid="5"/>
+                                        </p:tgtEl>
+                                      </p:cBhvr>
+                                    </p:animEffect>
+                                  </p:childTnLst>
+                                </p:cTn>
+                              </p:par>
+                            </p:childTnLst>
+                          </p:cTn>
+                        </p:par>
+                      </p:childTnLst>
+                    </p:cTn>
+                  </p:par>
+                  <p:par>
+                    <p:cTn id="16" fill="hold">
+                      <p:stCondLst>
+                        <p:cond delay="indefinite"/>
+                      </p:stCondLst>
+                      <p:childTnLst>
+                        <p:par>
+                          <p:cTn id="17" fill="hold">
+                            <p:stCondLst>
+                              <p:cond delay="0"/>
+                            </p:stCondLst>
+                            <p:childTnLst>
+                              <p:par>
+                                <p:cTn id="18" presetID="10" presetClass="entr" presetSubtype="0" fill="hold" grpId="0" nodeType="clickEffect">
+                                  <p:stCondLst>
+                                    <p:cond delay="0"/>
+                                  </p:stCondLst>
+                                  <p:childTnLst>
+                                    <p:set>
+                                      <p:cBhvr>
+                                        <p:cTn id="19" dur="1" fill="hold">
+                                          <p:stCondLst>
+                                            <p:cond delay="0"/>
+                                          </p:stCondLst>
+                                        </p:cTn>
+                                        <p:tgtEl>
+                                          <p:spTgt spid="10"/>
+                                        </p:tgtEl>
+                                        <p:attrNameLst>
+                                          <p:attrName>style.visibility</p:attrName>
+                                        </p:attrNameLst>
+                                      </p:cBhvr>
+                                      <p:to>
+                                        <p:strVal val="visible"/>
+                                      </p:to>
+                                    </p:set>
+                                    <p:animEffect transition="in" filter="fade">
+                                      <p:cBhvr>
+                                        <p:cTn id="20" dur="500"/>
+                                        <p:tgtEl>
+                                          <p:spTgt spid="10"/>
+                                        </p:tgtEl>
+                                      </p:cBhvr>
+                                    </p:animEffect>
+                                  </p:childTnLst>
+                                </p:cTn>
+                              </p:par>
+                            </p:childTnLst>
+                          </p:cTn>
+                        </p:par>
+                      </p:childTnLst>
+                    </p:cTn>
+                  </p:par>
+                  <p:par>
+                    <p:cTn id="21" fill="hold">
+                      <p:stCondLst>
+                        <p:cond delay="indefinite"/>
+                      </p:stCondLst>
+                      <p:childTnLst>
+                        <p:par>
+                          <p:cTn id="22" fill="hold">
+                            <p:stCondLst>
+                              <p:cond delay="0"/>
+                            </p:stCondLst>
+                            <p:childTnLst>
+                              <p:par>
+                                <p:cTn id="23" presetID="42" presetClass="entr" presetSubtype="0" fill="hold" grpId="0" nodeType="clickEffect">
+                                  <p:stCondLst>
+                                    <p:cond delay="0"/>
+                                  </p:stCondLst>
+                                  <p:childTnLst>
+                                    <p:set>
+                                      <p:cBhvr>
+                                        <p:cTn id="24" dur="1" fill="hold">
+                                          <p:stCondLst>
+                                            <p:cond delay="0"/>
+                                          </p:stCondLst>
+                                        </p:cTn>
+                                        <p:tgtEl>
+                                          <p:spTgt spid="7"/>
+                                        </p:tgtEl>
+                                        <p:attrNameLst>
+                                          <p:attrName>style.visibility</p:attrName>
+                                        </p:attrNameLst>
+                                      </p:cBhvr>
+                                      <p:to>
+                                        <p:strVal val="visible"/>
+                                      </p:to>
+                                    </p:set>
+                                    <p:animEffect transition="in" filter="fade">
+                                      <p:cBhvr>
+                                        <p:cTn id="25" dur="1000"/>
+                                        <p:tgtEl>
+                                          <p:spTgt spid="7"/>
+                                        </p:tgtEl>
+                                      </p:cBhvr>
+                                    </p:animEffect>
+                                    <p:anim calcmode="lin" valueType="num">
+                                      <p:cBhvr>
+                                        <p:cTn id="26" dur="1000" fill="hold"/>
+                                        <p:tgtEl>
+                                          <p:spTgt spid="7"/>
+                                        </p:tgtEl>
+                                        <p:attrNameLst>
+                                          <p:attrName>ppt_x</p:attrName>
+                                        </p:attrNameLst>
+                                      </p:cBhvr>
+                                      <p:tavLst>
+                                        <p:tav tm="0">
+                                          <p:val>
+                                            <p:strVal val="#ppt_x"/>
+                                          </p:val>
+                                        </p:tav>
+                                        <p:tav tm="100000">
+                                          <p:val>
+                                            <p:strVal val="#ppt_x"/>
+                                          </p:val>
+                                        </p:tav>
+                                      </p:tavLst>
+                                    </p:anim>
+                                    <p:anim calcmode="lin" valueType="num">
+                                      <p:cBhvr>
+                                        <p:cTn id="27" dur="1000" fill="hold"/>
+                                        <p:tgtEl>
+                                          <p:spTgt spid="7"/>
+                                        </p:tgtEl>
+                                        <p:attrNameLst>
+                                          <p:attrName>ppt_y</p:attrName>
+                                        </p:attrNameLst>
+                                      </p:cBhvr>
+                                      <p:tavLst>
+                                        <p:tav tm="0">
+                                          <p:val>
+                                            <p:strVal val="#ppt_y+.1"/>
+                                          </p:val>
+                                        </p:tav>
+                                        <p:tav tm="100000">
+                                          <p:val>
+                                            <p:strVal val="#ppt_y"/>
+                                          </p:val>
+                                        </p:tav>
+                                      </p:tavLst>
+                                    </p:anim>
+                                  </p:childTnLst>
+                                </p:cTn>
+                              </p:par>
+                            </p:childTnLst>
+                          </p:cTn>
+                        </p:par>
+                      </p:childTnLst>
+                    </p:cTn>
+                  </p:par>
+                  <p:par>
+                    <p:cTn id="28" fill="hold">
+                      <p:stCondLst>
+                        <p:cond delay="indefinite"/>
+                      </p:stCondLst>
+                      <p:childTnLst>
+                        <p:par>
+                          <p:cTn id="29" fill="hold">
+                            <p:stCondLst>
+                              <p:cond delay="0"/>
+                            </p:stCondLst>
+                            <p:childTnLst>
+                              <p:par>
+                                <p:cTn id="30" presetID="10" presetClass="entr" presetSubtype="0" fill="hold" grpId="0" nodeType="clickEffect">
+                                  <p:stCondLst>
+                                    <p:cond delay="0"/>
+                                  </p:stCondLst>
+                                  <p:childTnLst>
+                                    <p:set>
+                                      <p:cBhvr>
+                                        <p:cTn id="31" dur="1" fill="hold">
+                                          <p:stCondLst>
+                                            <p:cond delay="0"/>
+                                          </p:stCondLst>
+                                        </p:cTn>
+                                        <p:tgtEl>
+                                          <p:spTgt spid="11"/>
+                                        </p:tgtEl>
+                                        <p:attrNameLst>
+                                          <p:attrName>style.visibility</p:attrName>
+                                        </p:attrNameLst>
+                                      </p:cBhvr>
+                                      <p:to>
+                                        <p:strVal val="visible"/>
+                                      </p:to>
+                                    </p:set>
+                                    <p:animEffect transition="in" filter="fade">
+                                      <p:cBhvr>
+                                        <p:cTn id="32" dur="500"/>
+                                        <p:tgtEl>
+                                          <p:spTgt spid="11"/>
+                                        </p:tgtEl>
+                                      </p:cBhvr>
+                                    </p:animEffect>
+                                  </p:childTnLst>
+                                </p:cTn>
+                              </p:par>
+                            </p:childTnLst>
+                          </p:cTn>
+                        </p:par>
+                      </p:childTnLst>
+                    </p:cTn>
+                  </p:par>
+                  <p:par>
+                    <p:cTn id="33" fill="hold">
+                      <p:stCondLst>
+                        <p:cond delay="indefinite"/>
+                      </p:stCondLst>
+                      <p:childTnLst>
+                        <p:par>
+                          <p:cTn id="34" fill="hold">
+                            <p:stCondLst>
+                              <p:cond delay="0"/>
+                            </p:stCondLst>
+                            <p:childTnLst>
+                              <p:par>
+                                <p:cTn id="35" presetID="31" presetClass="entr" presetSubtype="0" fill="hold" grpId="0" nodeType="clickEffect">
+                                  <p:stCondLst>
+                                    <p:cond delay="0"/>
+                                  </p:stCondLst>
+                                  <p:childTnLst>
+                                    <p:set>
+                                      <p:cBhvr>
+                                        <p:cTn id="36" dur="1" fill="hold">
+                                          <p:stCondLst>
+                                            <p:cond delay="0"/>
+                                          </p:stCondLst>
+                                        </p:cTn>
+                                        <p:tgtEl>
+                                          <p:spTgt spid="9"/>
+                                        </p:tgtEl>
+                                        <p:attrNameLst>
+                                          <p:attrName>style.visibility</p:attrName>
+                                        </p:attrNameLst>
+                                      </p:cBhvr>
+                                      <p:to>
+                                        <p:strVal val="visible"/>
+                                      </p:to>
+                                    </p:set>
+                                    <p:anim calcmode="lin" valueType="num">
+                                      <p:cBhvr>
+                                        <p:cTn id="37" dur="1000" fill="hold"/>
+                                        <p:tgtEl>
+                                          <p:spTgt spid="9"/>
+                                        </p:tgtEl>
+                                        <p:attrNameLst>
+                                          <p:attrName>ppt_w</p:attrName>
+                                        </p:attrNameLst>
+                                      </p:cBhvr>
+                                      <p:tavLst>
+                                        <p:tav tm="0">
+                                          <p:val>
+                                            <p:fltVal val="0"/>
+                                          </p:val>
+                                        </p:tav>
+                                        <p:tav tm="100000">
+                                          <p:val>
+                                            <p:strVal val="#ppt_w"/>
+                                          </p:val>
+                                        </p:tav>
+                                      </p:tavLst>
+                                    </p:anim>
+                                    <p:anim calcmode="lin" valueType="num">
+                                      <p:cBhvr>
+                                        <p:cTn id="38" dur="1000" fill="hold"/>
+                                        <p:tgtEl>
+                                          <p:spTgt spid="9"/>
+                                        </p:tgtEl>
+                                        <p:attrNameLst>
+                                          <p:attrName>ppt_h</p:attrName>
+                                        </p:attrNameLst>
+                                      </p:cBhvr>
+                                      <p:tavLst>
+                                        <p:tav tm="0">
+                                          <p:val>
+                                            <p:fltVal val="0"/>
+                                          </p:val>
+                                        </p:tav>
+                                        <p:tav tm="100000">
+                                          <p:val>
+                                            <p:strVal val="#ppt_h"/>
+                                          </p:val>
+                                        </p:tav>
+                                      </p:tavLst>
+                                    </p:anim>
+                                    <p:anim calcmode="lin" valueType="num">
+                                      <p:cBhvr>
+                                        <p:cTn id="39" dur="1000" fill="hold"/>
+                                        <p:tgtEl>
+                                          <p:spTgt spid="9"/>
+                                        </p:tgtEl>
+                                        <p:attrNameLst>
+                                          <p:attrName>style.rotation</p:attrName>
+                                        </p:attrNameLst>
+                                      </p:cBhvr>
+                                      <p:tavLst>
+                                        <p:tav tm="0">
+                                          <p:val>
+                                            <p:fltVal val="90"/>
+                                          </p:val>
+                                        </p:tav>
+                                        <p:tav tm="100000">
+                                          <p:val>
+                                            <p:fltVal val="0"/>
+                                          </p:val>
+                                        </p:tav>
+                                      </p:tavLst>
+                                    </p:anim>
+                                    <p:animEffect transition="in" filter="fade">
+                                      <p:cBhvr>
+                                        <p:cTn id="40" dur="1000"/>
+                                        <p:tgtEl>
+                                          <p:spTgt spid="9"/>
+                                        </p:tgtEl>
+                                      </p:cBhvr>
+                                    </p:animEffect>
+                                  </p:childTnLst>
+                                </p:cTn>
+                              </p:par>
+                            </p:childTnLst>
+                          </p:cTn>
+                        </p:par>
+                      </p:childTnLst>
+                    </p:cTn>
+                  </p:par>
+                </p:childTnLst>
+              </p:cTn>
+              <p:prevCondLst>
+                <p:cond evt="onPrev" delay="0">
+                  <p:tgtEl>
+                    <p:sldTgt/>
+                  </p:tgtEl>
+                </p:cond>
+              </p:prevCondLst>
+              <p:nextCondLst>
+                <p:cond evt="onNext" delay="0">
+                  <p:tgtEl>
+                    <p:sldTgt/>
+                  </p:tgtEl>
+                </p:cond>
+              </p:nextCondLst>
+            </p:seq>
+          </p:childTnLst>
+        </p:cTn>
+      </p:par>
+    </p:tnLst>
+    <p:bldLst>
+      <p:bldP spid="5" grpId="0"/>
+      <p:bldP spid="7" grpId="0"/>
+      <p:bldP spid="9" grpId="0"/>
+      <p:bldP spid="3" grpId="0" animBg="1"/>
+      <p:bldP spid="10" grpId="0" animBg="1"/>
+      <p:bldP spid="11" grpId="0" animBg="1"/>
+    </p:bldLst>
+  </p:timing>
 </p:sld>
 </file>
 
